--- a/RAC/13장/13장_RAC스토리지관리.pptx
+++ b/RAC/13장/13장_RAC스토리지관리.pptx
@@ -4,44 +4,47 @@
   <p:sldMasterIdLst>
     <p:sldMasterId id="2147483648" r:id="rId1"/>
   </p:sldMasterIdLst>
+  <p:notesMasterIdLst>
+    <p:notesMasterId r:id="rId37"/>
+  </p:notesMasterIdLst>
   <p:sldIdLst>
-    <p:sldId id="256" r:id="rId7"/>
-    <p:sldId id="257" r:id="rId8"/>
-    <p:sldId id="258" r:id="rId9"/>
-    <p:sldId id="259" r:id="rId10"/>
-    <p:sldId id="260" r:id="rId12"/>
-    <p:sldId id="261" r:id="rId13"/>
-    <p:sldId id="262" r:id="rId14"/>
-    <p:sldId id="263" r:id="rId15"/>
-    <p:sldId id="264" r:id="rId16"/>
-    <p:sldId id="265" r:id="rId17"/>
-    <p:sldId id="266" r:id="rId18"/>
-    <p:sldId id="267" r:id="rId19"/>
-    <p:sldId id="268" r:id="rId20"/>
-    <p:sldId id="269" r:id="rId21"/>
-    <p:sldId id="270" r:id="rId22"/>
-    <p:sldId id="271" r:id="rId23"/>
-    <p:sldId id="272" r:id="rId24"/>
-    <p:sldId id="273" r:id="rId25"/>
-    <p:sldId id="274" r:id="rId26"/>
-    <p:sldId id="275" r:id="rId27"/>
-    <p:sldId id="276" r:id="rId28"/>
-    <p:sldId id="277" r:id="rId29"/>
-    <p:sldId id="278" r:id="rId30"/>
-    <p:sldId id="279" r:id="rId31"/>
-    <p:sldId id="280" r:id="rId32"/>
-    <p:sldId id="281" r:id="rId33"/>
-    <p:sldId id="282" r:id="rId34"/>
-    <p:sldId id="283" r:id="rId35"/>
-    <p:sldId id="284" r:id="rId36"/>
-    <p:sldId id="285" r:id="rId37"/>
-    <p:sldId id="286" r:id="rId38"/>
-    <p:sldId id="287" r:id="rId39"/>
-    <p:sldId id="288" r:id="rId40"/>
-    <p:sldId id="289" r:id="rId41"/>
-    <p:sldId id="290" r:id="rId42"/>
+    <p:sldId id="256" r:id="rId2"/>
+    <p:sldId id="257" r:id="rId3"/>
+    <p:sldId id="258" r:id="rId4"/>
+    <p:sldId id="259" r:id="rId5"/>
+    <p:sldId id="260" r:id="rId6"/>
+    <p:sldId id="261" r:id="rId7"/>
+    <p:sldId id="262" r:id="rId8"/>
+    <p:sldId id="263" r:id="rId9"/>
+    <p:sldId id="264" r:id="rId10"/>
+    <p:sldId id="265" r:id="rId11"/>
+    <p:sldId id="266" r:id="rId12"/>
+    <p:sldId id="267" r:id="rId13"/>
+    <p:sldId id="268" r:id="rId14"/>
+    <p:sldId id="269" r:id="rId15"/>
+    <p:sldId id="270" r:id="rId16"/>
+    <p:sldId id="271" r:id="rId17"/>
+    <p:sldId id="272" r:id="rId18"/>
+    <p:sldId id="273" r:id="rId19"/>
+    <p:sldId id="274" r:id="rId20"/>
+    <p:sldId id="275" r:id="rId21"/>
+    <p:sldId id="276" r:id="rId22"/>
+    <p:sldId id="277" r:id="rId23"/>
+    <p:sldId id="278" r:id="rId24"/>
+    <p:sldId id="279" r:id="rId25"/>
+    <p:sldId id="280" r:id="rId26"/>
+    <p:sldId id="281" r:id="rId27"/>
+    <p:sldId id="282" r:id="rId28"/>
+    <p:sldId id="283" r:id="rId29"/>
+    <p:sldId id="284" r:id="rId30"/>
+    <p:sldId id="285" r:id="rId31"/>
+    <p:sldId id="286" r:id="rId32"/>
+    <p:sldId id="287" r:id="rId33"/>
+    <p:sldId id="288" r:id="rId34"/>
+    <p:sldId id="289" r:id="rId35"/>
+    <p:sldId id="290" r:id="rId36"/>
   </p:sldIdLst>
-  <p:sldSz cx="12191695" cy="6858000" type="screen4x3"/>
+  <p:sldSz cx="12192000" cy="6858000"/>
   <p:notesSz cx="6858000" cy="9144000"/>
   <p:defaultTextStyle>
     <a:defPPr>
@@ -138,11 +141,27 @@
       </a:defRPr>
     </a:lvl9pPr>
   </p:defaultTextStyle>
+  <p:extLst>
+    <p:ext uri="{EFAFB233-063F-42B5-8137-9DF3F51BA10A}">
+      <p15:sldGuideLst xmlns:p15="http://schemas.microsoft.com/office/powerpoint/2012/main">
+        <p15:guide id="1" orient="horz" pos="2160">
+          <p15:clr>
+            <a:srgbClr val="A4A3A4"/>
+          </p15:clr>
+        </p15:guide>
+        <p15:guide id="2" pos="2880">
+          <p15:clr>
+            <a:srgbClr val="A4A3A4"/>
+          </p15:clr>
+        </p15:guide>
+      </p15:sldGuideLst>
+    </p:ext>
+  </p:extLst>
 </p:presentation>
 </file>
 
 <file path=ppt/notesMasters/notesMaster1.xml><?xml version="1.0" encoding="utf-8"?>
-<p:notesMaster xmlns:a="http://schemas.openxmlformats.org/drawingml/2006/main" xmlns:p="http://schemas.openxmlformats.org/presentationml/2006/main" xmlns:r="http://schemas.openxmlformats.org/officeDocument/2006/relationships">
+<p:notesMaster xmlns:a="http://schemas.openxmlformats.org/drawingml/2006/main" xmlns:r="http://schemas.openxmlformats.org/officeDocument/2006/relationships" xmlns:p="http://schemas.openxmlformats.org/presentationml/2006/main">
   <p:cSld>
     <p:bg>
       <p:bgRef idx="1001">
@@ -165,7 +184,7 @@
       </p:grpSpPr>
       <p:sp>
         <p:nvSpPr>
-          <p:cNvPr id="2" name="Header Placeholder 1"/>
+          <p:cNvPr id="2" name="머리글 개체 틀 1"/>
           <p:cNvSpPr>
             <a:spLocks noGrp="1"/>
           </p:cNvSpPr>
@@ -176,7 +195,7 @@
         <p:spPr>
           <a:xfrm>
             <a:off x="0" y="0"/>
-            <a:ext cx="2971800" cy="457200"/>
+            <a:ext cx="2971800" cy="458788"/>
           </a:xfrm>
           <a:prstGeom prst="rect">
             <a:avLst/>
@@ -190,13 +209,13 @@
             </a:lvl1pPr>
           </a:lstStyle>
           <a:p>
-            <a:endParaRPr lang="en-US"/>
-          </a:p>
-        </p:txBody>
-      </p:sp>
-      <p:sp>
-        <p:nvSpPr>
-          <p:cNvPr id="3" name="Date Placeholder 2"/>
+            <a:endParaRPr lang="ko-KR" altLang="en-US"/>
+          </a:p>
+        </p:txBody>
+      </p:sp>
+      <p:sp>
+        <p:nvSpPr>
+          <p:cNvPr id="3" name="날짜 개체 틀 2"/>
           <p:cNvSpPr>
             <a:spLocks noGrp="1"/>
           </p:cNvSpPr>
@@ -207,7 +226,7 @@
         <p:spPr>
           <a:xfrm>
             <a:off x="3884613" y="0"/>
-            <a:ext cx="2971800" cy="457200"/>
+            <a:ext cx="2971800" cy="458788"/>
           </a:xfrm>
           <a:prstGeom prst="rect">
             <a:avLst/>
@@ -221,17 +240,17 @@
             </a:lvl1pPr>
           </a:lstStyle>
           <a:p>
-            <a:fld id="{0F89C1C7-3DCD-1040-A9CF-14679D8B5DDD}" type="datetimeFigureOut">
-              <a:rPr lang="en-US" smtClean="0"/>
-              <a:t>10/17/16</a:t>
+            <a:fld id="{DC162547-3872-43A9-9629-89CC465F61A0}" type="datetimeFigureOut">
+              <a:rPr lang="ko-KR" altLang="en-US" smtClean="0"/>
+              <a:t>2026-10-29</a:t>
             </a:fld>
-            <a:endParaRPr lang="en-US"/>
-          </a:p>
-        </p:txBody>
-      </p:sp>
-      <p:sp>
-        <p:nvSpPr>
-          <p:cNvPr id="4" name="Slide Image Placeholder 3"/>
+            <a:endParaRPr lang="ko-KR" altLang="en-US"/>
+          </a:p>
+        </p:txBody>
+      </p:sp>
+      <p:sp>
+        <p:nvSpPr>
+          <p:cNvPr id="4" name="슬라이드 이미지 개체 틀 3"/>
           <p:cNvSpPr>
             <a:spLocks noGrp="1" noRot="1" noChangeAspect="1"/>
           </p:cNvSpPr>
@@ -241,8 +260,8 @@
         </p:nvSpPr>
         <p:spPr>
           <a:xfrm>
-            <a:off x="1143000" y="685800"/>
-            <a:ext cx="4572000" cy="3429000"/>
+            <a:off x="685800" y="1143000"/>
+            <a:ext cx="5486400" cy="3086100"/>
           </a:xfrm>
           <a:prstGeom prst="rect">
             <a:avLst/>
@@ -258,13 +277,13 @@
           <a:bodyPr vert="horz" lIns="91440" tIns="45720" rIns="91440" bIns="45720" rtlCol="0" anchor="ctr"/>
           <a:lstStyle/>
           <a:p>
-            <a:endParaRPr lang="en-US"/>
-          </a:p>
-        </p:txBody>
-      </p:sp>
-      <p:sp>
-        <p:nvSpPr>
-          <p:cNvPr id="5" name="Notes Placeholder 4"/>
+            <a:endParaRPr lang="ko-KR" altLang="en-US"/>
+          </a:p>
+        </p:txBody>
+      </p:sp>
+      <p:sp>
+        <p:nvSpPr>
+          <p:cNvPr id="5" name="슬라이드 노트 개체 틀 4"/>
           <p:cNvSpPr>
             <a:spLocks noGrp="1"/>
           </p:cNvSpPr>
@@ -274,8 +293,8 @@
         </p:nvSpPr>
         <p:spPr>
           <a:xfrm>
-            <a:off x="685800" y="4343400"/>
-            <a:ext cx="5486400" cy="4114800"/>
+            <a:off x="685800" y="4400550"/>
+            <a:ext cx="5486400" cy="3600450"/>
           </a:xfrm>
           <a:prstGeom prst="rect">
             <a:avLst/>
@@ -287,44 +306,43 @@
           <a:p>
             <a:pPr lvl="0"/>
             <a:r>
-              <a:rPr lang="en-US" smtClean="0"/>
-              <a:t>Click to edit Master text styles</a:t>
+              <a:rPr lang="ko-KR" altLang="en-US"/>
+              <a:t>마스터 텍스트 스타일을 편집하려면 클릭</a:t>
             </a:r>
           </a:p>
           <a:p>
             <a:pPr lvl="1"/>
             <a:r>
-              <a:rPr lang="en-US" smtClean="0"/>
-              <a:t>Second level</a:t>
+              <a:rPr lang="ko-KR" altLang="en-US"/>
+              <a:t>두 번째 수준</a:t>
             </a:r>
           </a:p>
           <a:p>
             <a:pPr lvl="2"/>
             <a:r>
-              <a:rPr lang="en-US" smtClean="0"/>
-              <a:t>Third level</a:t>
+              <a:rPr lang="ko-KR" altLang="en-US"/>
+              <a:t>세 번째 수준</a:t>
             </a:r>
           </a:p>
           <a:p>
             <a:pPr lvl="3"/>
             <a:r>
-              <a:rPr lang="en-US" smtClean="0"/>
-              <a:t>Fourth level</a:t>
+              <a:rPr lang="ko-KR" altLang="en-US"/>
+              <a:t>네 번째 수준</a:t>
             </a:r>
           </a:p>
           <a:p>
             <a:pPr lvl="4"/>
             <a:r>
-              <a:rPr lang="en-US" smtClean="0"/>
-              <a:t>Fifth level</a:t>
-            </a:r>
-            <a:endParaRPr lang="en-US"/>
-          </a:p>
-        </p:txBody>
-      </p:sp>
-      <p:sp>
-        <p:nvSpPr>
-          <p:cNvPr id="6" name="Footer Placeholder 5"/>
+              <a:rPr lang="ko-KR" altLang="en-US"/>
+              <a:t>다섯 번째 수준</a:t>
+            </a:r>
+          </a:p>
+        </p:txBody>
+      </p:sp>
+      <p:sp>
+        <p:nvSpPr>
+          <p:cNvPr id="6" name="바닥글 개체 틀 5"/>
           <p:cNvSpPr>
             <a:spLocks noGrp="1"/>
           </p:cNvSpPr>
@@ -335,7 +353,7 @@
         <p:spPr>
           <a:xfrm>
             <a:off x="0" y="8685213"/>
-            <a:ext cx="2971800" cy="457200"/>
+            <a:ext cx="2971800" cy="458787"/>
           </a:xfrm>
           <a:prstGeom prst="rect">
             <a:avLst/>
@@ -349,13 +367,13 @@
             </a:lvl1pPr>
           </a:lstStyle>
           <a:p>
-            <a:endParaRPr lang="en-US"/>
-          </a:p>
-        </p:txBody>
-      </p:sp>
-      <p:sp>
-        <p:nvSpPr>
-          <p:cNvPr id="7" name="Slide Number Placeholder 6"/>
+            <a:endParaRPr lang="ko-KR" altLang="en-US"/>
+          </a:p>
+        </p:txBody>
+      </p:sp>
+      <p:sp>
+        <p:nvSpPr>
+          <p:cNvPr id="7" name="슬라이드 번호 개체 틀 6"/>
           <p:cNvSpPr>
             <a:spLocks noGrp="1"/>
           </p:cNvSpPr>
@@ -366,7 +384,7 @@
         <p:spPr>
           <a:xfrm>
             <a:off x="3884613" y="8685213"/>
-            <a:ext cx="2971800" cy="457200"/>
+            <a:ext cx="2971800" cy="458787"/>
           </a:xfrm>
           <a:prstGeom prst="rect">
             <a:avLst/>
@@ -380,24 +398,24 @@
             </a:lvl1pPr>
           </a:lstStyle>
           <a:p>
-            <a:fld id="{BB5E49A5-4136-284D-997B-48E1D791AD67}" type="slidenum">
-              <a:rPr lang="en-US" smtClean="0"/>
+            <a:fld id="{3BF58314-024B-4CBA-8BE9-A649409E24D8}" type="slidenum">
+              <a:rPr lang="ko-KR" altLang="en-US" smtClean="0"/>
               <a:t>‹#›</a:t>
             </a:fld>
-            <a:endParaRPr lang="en-US"/>
+            <a:endParaRPr lang="ko-KR" altLang="en-US"/>
           </a:p>
         </p:txBody>
       </p:sp>
     </p:spTree>
     <p:extLst>
       <p:ext uri="{BB962C8B-B14F-4D97-AF65-F5344CB8AC3E}">
-        <p14:creationId xmlns:p14="http://schemas.microsoft.com/office/powerpoint/2010/main" val="2623252185"/>
+        <p14:creationId xmlns:p14="http://schemas.microsoft.com/office/powerpoint/2010/main" val="162011087"/>
       </p:ext>
     </p:extLst>
   </p:cSld>
   <p:clrMap bg1="lt1" tx1="dk1" bg2="lt2" tx2="dk2" accent1="accent1" accent2="accent2" accent3="accent3" accent4="accent4" accent5="accent5" accent6="accent6" hlink="hlink" folHlink="folHlink"/>
   <p:notesStyle>
-    <a:lvl1pPr marL="0" algn="l" defTabSz="457200" rtl="0" eaLnBrk="1" latinLnBrk="0" hangingPunct="1">
+    <a:lvl1pPr marL="0" algn="l" defTabSz="914400" rtl="0" eaLnBrk="1" latinLnBrk="1" hangingPunct="1">
       <a:defRPr sz="1200" kern="1200">
         <a:solidFill>
           <a:schemeClr val="tx1"/>
@@ -407,7 +425,7 @@
         <a:cs typeface="+mn-cs"/>
       </a:defRPr>
     </a:lvl1pPr>
-    <a:lvl2pPr marL="457200" algn="l" defTabSz="457200" rtl="0" eaLnBrk="1" latinLnBrk="0" hangingPunct="1">
+    <a:lvl2pPr marL="457200" algn="l" defTabSz="914400" rtl="0" eaLnBrk="1" latinLnBrk="1" hangingPunct="1">
       <a:defRPr sz="1200" kern="1200">
         <a:solidFill>
           <a:schemeClr val="tx1"/>
@@ -417,7 +435,7 @@
         <a:cs typeface="+mn-cs"/>
       </a:defRPr>
     </a:lvl2pPr>
-    <a:lvl3pPr marL="914400" algn="l" defTabSz="457200" rtl="0" eaLnBrk="1" latinLnBrk="0" hangingPunct="1">
+    <a:lvl3pPr marL="914400" algn="l" defTabSz="914400" rtl="0" eaLnBrk="1" latinLnBrk="1" hangingPunct="1">
       <a:defRPr sz="1200" kern="1200">
         <a:solidFill>
           <a:schemeClr val="tx1"/>
@@ -427,7 +445,7 @@
         <a:cs typeface="+mn-cs"/>
       </a:defRPr>
     </a:lvl3pPr>
-    <a:lvl4pPr marL="1371600" algn="l" defTabSz="457200" rtl="0" eaLnBrk="1" latinLnBrk="0" hangingPunct="1">
+    <a:lvl4pPr marL="1371600" algn="l" defTabSz="914400" rtl="0" eaLnBrk="1" latinLnBrk="1" hangingPunct="1">
       <a:defRPr sz="1200" kern="1200">
         <a:solidFill>
           <a:schemeClr val="tx1"/>
@@ -437,7 +455,7 @@
         <a:cs typeface="+mn-cs"/>
       </a:defRPr>
     </a:lvl4pPr>
-    <a:lvl5pPr marL="1828800" algn="l" defTabSz="457200" rtl="0" eaLnBrk="1" latinLnBrk="0" hangingPunct="1">
+    <a:lvl5pPr marL="1828800" algn="l" defTabSz="914400" rtl="0" eaLnBrk="1" latinLnBrk="1" hangingPunct="1">
       <a:defRPr sz="1200" kern="1200">
         <a:solidFill>
           <a:schemeClr val="tx1"/>
@@ -447,7 +465,7 @@
         <a:cs typeface="+mn-cs"/>
       </a:defRPr>
     </a:lvl5pPr>
-    <a:lvl6pPr marL="2286000" algn="l" defTabSz="457200" rtl="0" eaLnBrk="1" latinLnBrk="0" hangingPunct="1">
+    <a:lvl6pPr marL="2286000" algn="l" defTabSz="914400" rtl="0" eaLnBrk="1" latinLnBrk="1" hangingPunct="1">
       <a:defRPr sz="1200" kern="1200">
         <a:solidFill>
           <a:schemeClr val="tx1"/>
@@ -457,7 +475,7 @@
         <a:cs typeface="+mn-cs"/>
       </a:defRPr>
     </a:lvl6pPr>
-    <a:lvl7pPr marL="2743200" algn="l" defTabSz="457200" rtl="0" eaLnBrk="1" latinLnBrk="0" hangingPunct="1">
+    <a:lvl7pPr marL="2743200" algn="l" defTabSz="914400" rtl="0" eaLnBrk="1" latinLnBrk="1" hangingPunct="1">
       <a:defRPr sz="1200" kern="1200">
         <a:solidFill>
           <a:schemeClr val="tx1"/>
@@ -467,7 +485,7 @@
         <a:cs typeface="+mn-cs"/>
       </a:defRPr>
     </a:lvl7pPr>
-    <a:lvl8pPr marL="3200400" algn="l" defTabSz="457200" rtl="0" eaLnBrk="1" latinLnBrk="0" hangingPunct="1">
+    <a:lvl8pPr marL="3200400" algn="l" defTabSz="914400" rtl="0" eaLnBrk="1" latinLnBrk="1" hangingPunct="1">
       <a:defRPr sz="1200" kern="1200">
         <a:solidFill>
           <a:schemeClr val="tx1"/>
@@ -477,7 +495,7 @@
         <a:cs typeface="+mn-cs"/>
       </a:defRPr>
     </a:lvl8pPr>
-    <a:lvl9pPr marL="3657600" algn="l" defTabSz="457200" rtl="0" eaLnBrk="1" latinLnBrk="0" hangingPunct="1">
+    <a:lvl9pPr marL="3657600" algn="l" defTabSz="914400" rtl="0" eaLnBrk="1" latinLnBrk="1" hangingPunct="1">
       <a:defRPr sz="1200" kern="1200">
         <a:solidFill>
           <a:schemeClr val="tx1"/>
@@ -492,7 +510,7 @@
 </file>
 
 <file path=ppt/notesSlides/notesSlide1.xml><?xml version="1.0" encoding="utf-8"?>
-<p:notes xmlns:a="http://schemas.openxmlformats.org/drawingml/2006/main" xmlns:p="http://schemas.openxmlformats.org/presentationml/2006/main" xmlns:r="http://schemas.openxmlformats.org/officeDocument/2006/relationships">
+<p:notes xmlns:a="http://schemas.openxmlformats.org/drawingml/2006/main" xmlns:r="http://schemas.openxmlformats.org/officeDocument/2006/relationships" xmlns:p="http://schemas.openxmlformats.org/presentationml/2006/main">
   <p:cSld>
     <p:spTree>
       <p:nvGrpSpPr>
@@ -512,7 +530,7 @@
         <p:nvSpPr>
           <p:cNvPr id="2" name="Slide Image Placeholder 1"/>
           <p:cNvSpPr>
-            <a:spLocks noGrp="1"/>
+            <a:spLocks noGrp="1" noRot="1" noChangeAspect="1"/>
           </p:cNvSpPr>
           <p:nvPr>
             <p:ph type="sldImg" idx="2"/>
@@ -527,7 +545,7 @@
             <a:spLocks noGrp="1"/>
           </p:cNvSpPr>
           <p:nvPr>
-            <p:ph type="body" idx="3" sz="quarter"/>
+            <p:ph type="body" sz="quarter" idx="3"/>
           </p:nvPr>
         </p:nvSpPr>
         <p:spPr/>
@@ -548,7 +566,7 @@
             <a:spLocks noGrp="1"/>
           </p:cNvSpPr>
           <p:nvPr>
-            <p:ph type="sldNum" idx="5" sz="quarter"/>
+            <p:ph type="sldNum" sz="quarter" idx="5"/>
           </p:nvPr>
         </p:nvSpPr>
         <p:spPr/>
@@ -562,7 +580,7 @@
 </file>
 
 <file path=ppt/notesSlides/notesSlide10.xml><?xml version="1.0" encoding="utf-8"?>
-<p:notes xmlns:a="http://schemas.openxmlformats.org/drawingml/2006/main" xmlns:p="http://schemas.openxmlformats.org/presentationml/2006/main" xmlns:r="http://schemas.openxmlformats.org/officeDocument/2006/relationships">
+<p:notes xmlns:a="http://schemas.openxmlformats.org/drawingml/2006/main" xmlns:r="http://schemas.openxmlformats.org/officeDocument/2006/relationships" xmlns:p="http://schemas.openxmlformats.org/presentationml/2006/main">
   <p:cSld>
     <p:spTree>
       <p:nvGrpSpPr>
@@ -582,7 +600,7 @@
         <p:nvSpPr>
           <p:cNvPr id="2" name="Slide Image Placeholder 1"/>
           <p:cNvSpPr>
-            <a:spLocks noGrp="1"/>
+            <a:spLocks noGrp="1" noRot="1" noChangeAspect="1"/>
           </p:cNvSpPr>
           <p:nvPr>
             <p:ph type="sldImg" idx="2"/>
@@ -597,7 +615,7 @@
             <a:spLocks noGrp="1"/>
           </p:cNvSpPr>
           <p:nvPr>
-            <p:ph type="body" idx="3" sz="quarter"/>
+            <p:ph type="body" sz="quarter" idx="3"/>
           </p:nvPr>
         </p:nvSpPr>
         <p:spPr/>
@@ -618,7 +636,7 @@
             <a:spLocks noGrp="1"/>
           </p:cNvSpPr>
           <p:nvPr>
-            <p:ph type="sldNum" idx="5" sz="quarter"/>
+            <p:ph type="sldNum" sz="quarter" idx="5"/>
           </p:nvPr>
         </p:nvSpPr>
         <p:spPr/>
@@ -632,7 +650,7 @@
 </file>
 
 <file path=ppt/notesSlides/notesSlide11.xml><?xml version="1.0" encoding="utf-8"?>
-<p:notes xmlns:a="http://schemas.openxmlformats.org/drawingml/2006/main" xmlns:p="http://schemas.openxmlformats.org/presentationml/2006/main" xmlns:r="http://schemas.openxmlformats.org/officeDocument/2006/relationships">
+<p:notes xmlns:a="http://schemas.openxmlformats.org/drawingml/2006/main" xmlns:r="http://schemas.openxmlformats.org/officeDocument/2006/relationships" xmlns:p="http://schemas.openxmlformats.org/presentationml/2006/main">
   <p:cSld>
     <p:spTree>
       <p:nvGrpSpPr>
@@ -652,7 +670,7 @@
         <p:nvSpPr>
           <p:cNvPr id="2" name="Slide Image Placeholder 1"/>
           <p:cNvSpPr>
-            <a:spLocks noGrp="1"/>
+            <a:spLocks noGrp="1" noRot="1" noChangeAspect="1"/>
           </p:cNvSpPr>
           <p:nvPr>
             <p:ph type="sldImg" idx="2"/>
@@ -667,7 +685,7 @@
             <a:spLocks noGrp="1"/>
           </p:cNvSpPr>
           <p:nvPr>
-            <p:ph type="body" idx="3" sz="quarter"/>
+            <p:ph type="body" sz="quarter" idx="3"/>
           </p:nvPr>
         </p:nvSpPr>
         <p:spPr/>
@@ -688,7 +706,7 @@
             <a:spLocks noGrp="1"/>
           </p:cNvSpPr>
           <p:nvPr>
-            <p:ph type="sldNum" idx="5" sz="quarter"/>
+            <p:ph type="sldNum" sz="quarter" idx="5"/>
           </p:nvPr>
         </p:nvSpPr>
         <p:spPr/>
@@ -702,7 +720,7 @@
 </file>
 
 <file path=ppt/notesSlides/notesSlide12.xml><?xml version="1.0" encoding="utf-8"?>
-<p:notes xmlns:a="http://schemas.openxmlformats.org/drawingml/2006/main" xmlns:p="http://schemas.openxmlformats.org/presentationml/2006/main" xmlns:r="http://schemas.openxmlformats.org/officeDocument/2006/relationships">
+<p:notes xmlns:a="http://schemas.openxmlformats.org/drawingml/2006/main" xmlns:r="http://schemas.openxmlformats.org/officeDocument/2006/relationships" xmlns:p="http://schemas.openxmlformats.org/presentationml/2006/main">
   <p:cSld>
     <p:spTree>
       <p:nvGrpSpPr>
@@ -722,7 +740,7 @@
         <p:nvSpPr>
           <p:cNvPr id="2" name="Slide Image Placeholder 1"/>
           <p:cNvSpPr>
-            <a:spLocks noGrp="1"/>
+            <a:spLocks noGrp="1" noRot="1" noChangeAspect="1"/>
           </p:cNvSpPr>
           <p:nvPr>
             <p:ph type="sldImg" idx="2"/>
@@ -737,7 +755,7 @@
             <a:spLocks noGrp="1"/>
           </p:cNvSpPr>
           <p:nvPr>
-            <p:ph type="body" idx="3" sz="quarter"/>
+            <p:ph type="body" sz="quarter" idx="3"/>
           </p:nvPr>
         </p:nvSpPr>
         <p:spPr/>
@@ -758,7 +776,7 @@
             <a:spLocks noGrp="1"/>
           </p:cNvSpPr>
           <p:nvPr>
-            <p:ph type="sldNum" idx="5" sz="quarter"/>
+            <p:ph type="sldNum" sz="quarter" idx="5"/>
           </p:nvPr>
         </p:nvSpPr>
         <p:spPr/>
@@ -772,7 +790,7 @@
 </file>
 
 <file path=ppt/notesSlides/notesSlide13.xml><?xml version="1.0" encoding="utf-8"?>
-<p:notes xmlns:a="http://schemas.openxmlformats.org/drawingml/2006/main" xmlns:p="http://schemas.openxmlformats.org/presentationml/2006/main" xmlns:r="http://schemas.openxmlformats.org/officeDocument/2006/relationships">
+<p:notes xmlns:a="http://schemas.openxmlformats.org/drawingml/2006/main" xmlns:r="http://schemas.openxmlformats.org/officeDocument/2006/relationships" xmlns:p="http://schemas.openxmlformats.org/presentationml/2006/main">
   <p:cSld>
     <p:spTree>
       <p:nvGrpSpPr>
@@ -792,7 +810,7 @@
         <p:nvSpPr>
           <p:cNvPr id="2" name="Slide Image Placeholder 1"/>
           <p:cNvSpPr>
-            <a:spLocks noGrp="1"/>
+            <a:spLocks noGrp="1" noRot="1" noChangeAspect="1"/>
           </p:cNvSpPr>
           <p:nvPr>
             <p:ph type="sldImg" idx="2"/>
@@ -807,7 +825,7 @@
             <a:spLocks noGrp="1"/>
           </p:cNvSpPr>
           <p:nvPr>
-            <p:ph type="body" idx="3" sz="quarter"/>
+            <p:ph type="body" sz="quarter" idx="3"/>
           </p:nvPr>
         </p:nvSpPr>
         <p:spPr/>
@@ -828,7 +846,7 @@
             <a:spLocks noGrp="1"/>
           </p:cNvSpPr>
           <p:nvPr>
-            <p:ph type="sldNum" idx="5" sz="quarter"/>
+            <p:ph type="sldNum" sz="quarter" idx="5"/>
           </p:nvPr>
         </p:nvSpPr>
         <p:spPr/>
@@ -842,7 +860,7 @@
 </file>
 
 <file path=ppt/notesSlides/notesSlide14.xml><?xml version="1.0" encoding="utf-8"?>
-<p:notes xmlns:a="http://schemas.openxmlformats.org/drawingml/2006/main" xmlns:p="http://schemas.openxmlformats.org/presentationml/2006/main" xmlns:r="http://schemas.openxmlformats.org/officeDocument/2006/relationships">
+<p:notes xmlns:a="http://schemas.openxmlformats.org/drawingml/2006/main" xmlns:r="http://schemas.openxmlformats.org/officeDocument/2006/relationships" xmlns:p="http://schemas.openxmlformats.org/presentationml/2006/main">
   <p:cSld>
     <p:spTree>
       <p:nvGrpSpPr>
@@ -862,7 +880,7 @@
         <p:nvSpPr>
           <p:cNvPr id="2" name="Slide Image Placeholder 1"/>
           <p:cNvSpPr>
-            <a:spLocks noGrp="1"/>
+            <a:spLocks noGrp="1" noRot="1" noChangeAspect="1"/>
           </p:cNvSpPr>
           <p:nvPr>
             <p:ph type="sldImg" idx="2"/>
@@ -877,7 +895,7 @@
             <a:spLocks noGrp="1"/>
           </p:cNvSpPr>
           <p:nvPr>
-            <p:ph type="body" idx="3" sz="quarter"/>
+            <p:ph type="body" sz="quarter" idx="3"/>
           </p:nvPr>
         </p:nvSpPr>
         <p:spPr/>
@@ -898,7 +916,7 @@
             <a:spLocks noGrp="1"/>
           </p:cNvSpPr>
           <p:nvPr>
-            <p:ph type="sldNum" idx="5" sz="quarter"/>
+            <p:ph type="sldNum" sz="quarter" idx="5"/>
           </p:nvPr>
         </p:nvSpPr>
         <p:spPr/>
@@ -912,7 +930,7 @@
 </file>
 
 <file path=ppt/notesSlides/notesSlide15.xml><?xml version="1.0" encoding="utf-8"?>
-<p:notes xmlns:a="http://schemas.openxmlformats.org/drawingml/2006/main" xmlns:p="http://schemas.openxmlformats.org/presentationml/2006/main" xmlns:r="http://schemas.openxmlformats.org/officeDocument/2006/relationships">
+<p:notes xmlns:a="http://schemas.openxmlformats.org/drawingml/2006/main" xmlns:r="http://schemas.openxmlformats.org/officeDocument/2006/relationships" xmlns:p="http://schemas.openxmlformats.org/presentationml/2006/main">
   <p:cSld>
     <p:spTree>
       <p:nvGrpSpPr>
@@ -932,7 +950,7 @@
         <p:nvSpPr>
           <p:cNvPr id="2" name="Slide Image Placeholder 1"/>
           <p:cNvSpPr>
-            <a:spLocks noGrp="1"/>
+            <a:spLocks noGrp="1" noRot="1" noChangeAspect="1"/>
           </p:cNvSpPr>
           <p:nvPr>
             <p:ph type="sldImg" idx="2"/>
@@ -947,7 +965,7 @@
             <a:spLocks noGrp="1"/>
           </p:cNvSpPr>
           <p:nvPr>
-            <p:ph type="body" idx="3" sz="quarter"/>
+            <p:ph type="body" sz="quarter" idx="3"/>
           </p:nvPr>
         </p:nvSpPr>
         <p:spPr/>
@@ -968,7 +986,7 @@
             <a:spLocks noGrp="1"/>
           </p:cNvSpPr>
           <p:nvPr>
-            <p:ph type="sldNum" idx="5" sz="quarter"/>
+            <p:ph type="sldNum" sz="quarter" idx="5"/>
           </p:nvPr>
         </p:nvSpPr>
         <p:spPr/>
@@ -982,7 +1000,7 @@
 </file>
 
 <file path=ppt/notesSlides/notesSlide16.xml><?xml version="1.0" encoding="utf-8"?>
-<p:notes xmlns:a="http://schemas.openxmlformats.org/drawingml/2006/main" xmlns:p="http://schemas.openxmlformats.org/presentationml/2006/main" xmlns:r="http://schemas.openxmlformats.org/officeDocument/2006/relationships">
+<p:notes xmlns:a="http://schemas.openxmlformats.org/drawingml/2006/main" xmlns:r="http://schemas.openxmlformats.org/officeDocument/2006/relationships" xmlns:p="http://schemas.openxmlformats.org/presentationml/2006/main">
   <p:cSld>
     <p:spTree>
       <p:nvGrpSpPr>
@@ -1002,7 +1020,7 @@
         <p:nvSpPr>
           <p:cNvPr id="2" name="Slide Image Placeholder 1"/>
           <p:cNvSpPr>
-            <a:spLocks noGrp="1"/>
+            <a:spLocks noGrp="1" noRot="1" noChangeAspect="1"/>
           </p:cNvSpPr>
           <p:nvPr>
             <p:ph type="sldImg" idx="2"/>
@@ -1017,7 +1035,7 @@
             <a:spLocks noGrp="1"/>
           </p:cNvSpPr>
           <p:nvPr>
-            <p:ph type="body" idx="3" sz="quarter"/>
+            <p:ph type="body" sz="quarter" idx="3"/>
           </p:nvPr>
         </p:nvSpPr>
         <p:spPr/>
@@ -1038,7 +1056,7 @@
             <a:spLocks noGrp="1"/>
           </p:cNvSpPr>
           <p:nvPr>
-            <p:ph type="sldNum" idx="5" sz="quarter"/>
+            <p:ph type="sldNum" sz="quarter" idx="5"/>
           </p:nvPr>
         </p:nvSpPr>
         <p:spPr/>
@@ -1052,7 +1070,7 @@
 </file>
 
 <file path=ppt/notesSlides/notesSlide17.xml><?xml version="1.0" encoding="utf-8"?>
-<p:notes xmlns:a="http://schemas.openxmlformats.org/drawingml/2006/main" xmlns:p="http://schemas.openxmlformats.org/presentationml/2006/main" xmlns:r="http://schemas.openxmlformats.org/officeDocument/2006/relationships">
+<p:notes xmlns:a="http://schemas.openxmlformats.org/drawingml/2006/main" xmlns:r="http://schemas.openxmlformats.org/officeDocument/2006/relationships" xmlns:p="http://schemas.openxmlformats.org/presentationml/2006/main">
   <p:cSld>
     <p:spTree>
       <p:nvGrpSpPr>
@@ -1072,7 +1090,7 @@
         <p:nvSpPr>
           <p:cNvPr id="2" name="Slide Image Placeholder 1"/>
           <p:cNvSpPr>
-            <a:spLocks noGrp="1"/>
+            <a:spLocks noGrp="1" noRot="1" noChangeAspect="1"/>
           </p:cNvSpPr>
           <p:nvPr>
             <p:ph type="sldImg" idx="2"/>
@@ -1087,7 +1105,7 @@
             <a:spLocks noGrp="1"/>
           </p:cNvSpPr>
           <p:nvPr>
-            <p:ph type="body" idx="3" sz="quarter"/>
+            <p:ph type="body" sz="quarter" idx="3"/>
           </p:nvPr>
         </p:nvSpPr>
         <p:spPr/>
@@ -1108,7 +1126,7 @@
             <a:spLocks noGrp="1"/>
           </p:cNvSpPr>
           <p:nvPr>
-            <p:ph type="sldNum" idx="5" sz="quarter"/>
+            <p:ph type="sldNum" sz="quarter" idx="5"/>
           </p:nvPr>
         </p:nvSpPr>
         <p:spPr/>
@@ -1122,7 +1140,7 @@
 </file>
 
 <file path=ppt/notesSlides/notesSlide18.xml><?xml version="1.0" encoding="utf-8"?>
-<p:notes xmlns:a="http://schemas.openxmlformats.org/drawingml/2006/main" xmlns:p="http://schemas.openxmlformats.org/presentationml/2006/main" xmlns:r="http://schemas.openxmlformats.org/officeDocument/2006/relationships">
+<p:notes xmlns:a="http://schemas.openxmlformats.org/drawingml/2006/main" xmlns:r="http://schemas.openxmlformats.org/officeDocument/2006/relationships" xmlns:p="http://schemas.openxmlformats.org/presentationml/2006/main">
   <p:cSld>
     <p:spTree>
       <p:nvGrpSpPr>
@@ -1142,7 +1160,7 @@
         <p:nvSpPr>
           <p:cNvPr id="2" name="Slide Image Placeholder 1"/>
           <p:cNvSpPr>
-            <a:spLocks noGrp="1"/>
+            <a:spLocks noGrp="1" noRot="1" noChangeAspect="1"/>
           </p:cNvSpPr>
           <p:nvPr>
             <p:ph type="sldImg" idx="2"/>
@@ -1157,7 +1175,7 @@
             <a:spLocks noGrp="1"/>
           </p:cNvSpPr>
           <p:nvPr>
-            <p:ph type="body" idx="3" sz="quarter"/>
+            <p:ph type="body" sz="quarter" idx="3"/>
           </p:nvPr>
         </p:nvSpPr>
         <p:spPr/>
@@ -1178,7 +1196,7 @@
             <a:spLocks noGrp="1"/>
           </p:cNvSpPr>
           <p:nvPr>
-            <p:ph type="sldNum" idx="5" sz="quarter"/>
+            <p:ph type="sldNum" sz="quarter" idx="5"/>
           </p:nvPr>
         </p:nvSpPr>
         <p:spPr/>
@@ -1192,7 +1210,7 @@
 </file>
 
 <file path=ppt/notesSlides/notesSlide19.xml><?xml version="1.0" encoding="utf-8"?>
-<p:notes xmlns:a="http://schemas.openxmlformats.org/drawingml/2006/main" xmlns:p="http://schemas.openxmlformats.org/presentationml/2006/main" xmlns:r="http://schemas.openxmlformats.org/officeDocument/2006/relationships">
+<p:notes xmlns:a="http://schemas.openxmlformats.org/drawingml/2006/main" xmlns:r="http://schemas.openxmlformats.org/officeDocument/2006/relationships" xmlns:p="http://schemas.openxmlformats.org/presentationml/2006/main">
   <p:cSld>
     <p:spTree>
       <p:nvGrpSpPr>
@@ -1212,7 +1230,7 @@
         <p:nvSpPr>
           <p:cNvPr id="2" name="Slide Image Placeholder 1"/>
           <p:cNvSpPr>
-            <a:spLocks noGrp="1"/>
+            <a:spLocks noGrp="1" noRot="1" noChangeAspect="1"/>
           </p:cNvSpPr>
           <p:nvPr>
             <p:ph type="sldImg" idx="2"/>
@@ -1227,7 +1245,7 @@
             <a:spLocks noGrp="1"/>
           </p:cNvSpPr>
           <p:nvPr>
-            <p:ph type="body" idx="3" sz="quarter"/>
+            <p:ph type="body" sz="quarter" idx="3"/>
           </p:nvPr>
         </p:nvSpPr>
         <p:spPr/>
@@ -1248,7 +1266,7 @@
             <a:spLocks noGrp="1"/>
           </p:cNvSpPr>
           <p:nvPr>
-            <p:ph type="sldNum" idx="5" sz="quarter"/>
+            <p:ph type="sldNum" sz="quarter" idx="5"/>
           </p:nvPr>
         </p:nvSpPr>
         <p:spPr/>
@@ -1262,7 +1280,7 @@
 </file>
 
 <file path=ppt/notesSlides/notesSlide2.xml><?xml version="1.0" encoding="utf-8"?>
-<p:notes xmlns:a="http://schemas.openxmlformats.org/drawingml/2006/main" xmlns:p="http://schemas.openxmlformats.org/presentationml/2006/main" xmlns:r="http://schemas.openxmlformats.org/officeDocument/2006/relationships">
+<p:notes xmlns:a="http://schemas.openxmlformats.org/drawingml/2006/main" xmlns:r="http://schemas.openxmlformats.org/officeDocument/2006/relationships" xmlns:p="http://schemas.openxmlformats.org/presentationml/2006/main">
   <p:cSld>
     <p:spTree>
       <p:nvGrpSpPr>
@@ -1282,7 +1300,7 @@
         <p:nvSpPr>
           <p:cNvPr id="2" name="Slide Image Placeholder 1"/>
           <p:cNvSpPr>
-            <a:spLocks noGrp="1"/>
+            <a:spLocks noGrp="1" noRot="1" noChangeAspect="1"/>
           </p:cNvSpPr>
           <p:nvPr>
             <p:ph type="sldImg" idx="2"/>
@@ -1297,7 +1315,7 @@
             <a:spLocks noGrp="1"/>
           </p:cNvSpPr>
           <p:nvPr>
-            <p:ph type="body" idx="3" sz="quarter"/>
+            <p:ph type="body" sz="quarter" idx="3"/>
           </p:nvPr>
         </p:nvSpPr>
         <p:spPr/>
@@ -1318,7 +1336,7 @@
             <a:spLocks noGrp="1"/>
           </p:cNvSpPr>
           <p:nvPr>
-            <p:ph type="sldNum" idx="5" sz="quarter"/>
+            <p:ph type="sldNum" sz="quarter" idx="5"/>
           </p:nvPr>
         </p:nvSpPr>
         <p:spPr/>
@@ -1332,7 +1350,7 @@
 </file>
 
 <file path=ppt/notesSlides/notesSlide20.xml><?xml version="1.0" encoding="utf-8"?>
-<p:notes xmlns:a="http://schemas.openxmlformats.org/drawingml/2006/main" xmlns:p="http://schemas.openxmlformats.org/presentationml/2006/main" xmlns:r="http://schemas.openxmlformats.org/officeDocument/2006/relationships">
+<p:notes xmlns:a="http://schemas.openxmlformats.org/drawingml/2006/main" xmlns:r="http://schemas.openxmlformats.org/officeDocument/2006/relationships" xmlns:p="http://schemas.openxmlformats.org/presentationml/2006/main">
   <p:cSld>
     <p:spTree>
       <p:nvGrpSpPr>
@@ -1352,7 +1370,7 @@
         <p:nvSpPr>
           <p:cNvPr id="2" name="Slide Image Placeholder 1"/>
           <p:cNvSpPr>
-            <a:spLocks noGrp="1"/>
+            <a:spLocks noGrp="1" noRot="1" noChangeAspect="1"/>
           </p:cNvSpPr>
           <p:nvPr>
             <p:ph type="sldImg" idx="2"/>
@@ -1367,7 +1385,7 @@
             <a:spLocks noGrp="1"/>
           </p:cNvSpPr>
           <p:nvPr>
-            <p:ph type="body" idx="3" sz="quarter"/>
+            <p:ph type="body" sz="quarter" idx="3"/>
           </p:nvPr>
         </p:nvSpPr>
         <p:spPr/>
@@ -1388,7 +1406,7 @@
             <a:spLocks noGrp="1"/>
           </p:cNvSpPr>
           <p:nvPr>
-            <p:ph type="sldNum" idx="5" sz="quarter"/>
+            <p:ph type="sldNum" sz="quarter" idx="5"/>
           </p:nvPr>
         </p:nvSpPr>
         <p:spPr/>
@@ -1402,7 +1420,7 @@
 </file>
 
 <file path=ppt/notesSlides/notesSlide21.xml><?xml version="1.0" encoding="utf-8"?>
-<p:notes xmlns:a="http://schemas.openxmlformats.org/drawingml/2006/main" xmlns:p="http://schemas.openxmlformats.org/presentationml/2006/main" xmlns:r="http://schemas.openxmlformats.org/officeDocument/2006/relationships">
+<p:notes xmlns:a="http://schemas.openxmlformats.org/drawingml/2006/main" xmlns:r="http://schemas.openxmlformats.org/officeDocument/2006/relationships" xmlns:p="http://schemas.openxmlformats.org/presentationml/2006/main">
   <p:cSld>
     <p:spTree>
       <p:nvGrpSpPr>
@@ -1422,7 +1440,7 @@
         <p:nvSpPr>
           <p:cNvPr id="2" name="Slide Image Placeholder 1"/>
           <p:cNvSpPr>
-            <a:spLocks noGrp="1"/>
+            <a:spLocks noGrp="1" noRot="1" noChangeAspect="1"/>
           </p:cNvSpPr>
           <p:nvPr>
             <p:ph type="sldImg" idx="2"/>
@@ -1437,7 +1455,7 @@
             <a:spLocks noGrp="1"/>
           </p:cNvSpPr>
           <p:nvPr>
-            <p:ph type="body" idx="3" sz="quarter"/>
+            <p:ph type="body" sz="quarter" idx="3"/>
           </p:nvPr>
         </p:nvSpPr>
         <p:spPr/>
@@ -1458,7 +1476,7 @@
             <a:spLocks noGrp="1"/>
           </p:cNvSpPr>
           <p:nvPr>
-            <p:ph type="sldNum" idx="5" sz="quarter"/>
+            <p:ph type="sldNum" sz="quarter" idx="5"/>
           </p:nvPr>
         </p:nvSpPr>
         <p:spPr/>
@@ -1472,7 +1490,7 @@
 </file>
 
 <file path=ppt/notesSlides/notesSlide22.xml><?xml version="1.0" encoding="utf-8"?>
-<p:notes xmlns:a="http://schemas.openxmlformats.org/drawingml/2006/main" xmlns:p="http://schemas.openxmlformats.org/presentationml/2006/main" xmlns:r="http://schemas.openxmlformats.org/officeDocument/2006/relationships">
+<p:notes xmlns:a="http://schemas.openxmlformats.org/drawingml/2006/main" xmlns:r="http://schemas.openxmlformats.org/officeDocument/2006/relationships" xmlns:p="http://schemas.openxmlformats.org/presentationml/2006/main">
   <p:cSld>
     <p:spTree>
       <p:nvGrpSpPr>
@@ -1492,7 +1510,7 @@
         <p:nvSpPr>
           <p:cNvPr id="2" name="Slide Image Placeholder 1"/>
           <p:cNvSpPr>
-            <a:spLocks noGrp="1"/>
+            <a:spLocks noGrp="1" noRot="1" noChangeAspect="1"/>
           </p:cNvSpPr>
           <p:nvPr>
             <p:ph type="sldImg" idx="2"/>
@@ -1507,7 +1525,7 @@
             <a:spLocks noGrp="1"/>
           </p:cNvSpPr>
           <p:nvPr>
-            <p:ph type="body" idx="3" sz="quarter"/>
+            <p:ph type="body" sz="quarter" idx="3"/>
           </p:nvPr>
         </p:nvSpPr>
         <p:spPr/>
@@ -1528,7 +1546,7 @@
             <a:spLocks noGrp="1"/>
           </p:cNvSpPr>
           <p:nvPr>
-            <p:ph type="sldNum" idx="5" sz="quarter"/>
+            <p:ph type="sldNum" sz="quarter" idx="5"/>
           </p:nvPr>
         </p:nvSpPr>
         <p:spPr/>
@@ -1542,7 +1560,7 @@
 </file>
 
 <file path=ppt/notesSlides/notesSlide23.xml><?xml version="1.0" encoding="utf-8"?>
-<p:notes xmlns:a="http://schemas.openxmlformats.org/drawingml/2006/main" xmlns:p="http://schemas.openxmlformats.org/presentationml/2006/main" xmlns:r="http://schemas.openxmlformats.org/officeDocument/2006/relationships">
+<p:notes xmlns:a="http://schemas.openxmlformats.org/drawingml/2006/main" xmlns:r="http://schemas.openxmlformats.org/officeDocument/2006/relationships" xmlns:p="http://schemas.openxmlformats.org/presentationml/2006/main">
   <p:cSld>
     <p:spTree>
       <p:nvGrpSpPr>
@@ -1562,7 +1580,7 @@
         <p:nvSpPr>
           <p:cNvPr id="2" name="Slide Image Placeholder 1"/>
           <p:cNvSpPr>
-            <a:spLocks noGrp="1"/>
+            <a:spLocks noGrp="1" noRot="1" noChangeAspect="1"/>
           </p:cNvSpPr>
           <p:nvPr>
             <p:ph type="sldImg" idx="2"/>
@@ -1577,7 +1595,7 @@
             <a:spLocks noGrp="1"/>
           </p:cNvSpPr>
           <p:nvPr>
-            <p:ph type="body" idx="3" sz="quarter"/>
+            <p:ph type="body" sz="quarter" idx="3"/>
           </p:nvPr>
         </p:nvSpPr>
         <p:spPr/>
@@ -1598,7 +1616,7 @@
             <a:spLocks noGrp="1"/>
           </p:cNvSpPr>
           <p:nvPr>
-            <p:ph type="sldNum" idx="5" sz="quarter"/>
+            <p:ph type="sldNum" sz="quarter" idx="5"/>
           </p:nvPr>
         </p:nvSpPr>
         <p:spPr/>
@@ -1612,7 +1630,7 @@
 </file>
 
 <file path=ppt/notesSlides/notesSlide24.xml><?xml version="1.0" encoding="utf-8"?>
-<p:notes xmlns:a="http://schemas.openxmlformats.org/drawingml/2006/main" xmlns:p="http://schemas.openxmlformats.org/presentationml/2006/main" xmlns:r="http://schemas.openxmlformats.org/officeDocument/2006/relationships">
+<p:notes xmlns:a="http://schemas.openxmlformats.org/drawingml/2006/main" xmlns:r="http://schemas.openxmlformats.org/officeDocument/2006/relationships" xmlns:p="http://schemas.openxmlformats.org/presentationml/2006/main">
   <p:cSld>
     <p:spTree>
       <p:nvGrpSpPr>
@@ -1632,7 +1650,7 @@
         <p:nvSpPr>
           <p:cNvPr id="2" name="Slide Image Placeholder 1"/>
           <p:cNvSpPr>
-            <a:spLocks noGrp="1"/>
+            <a:spLocks noGrp="1" noRot="1" noChangeAspect="1"/>
           </p:cNvSpPr>
           <p:nvPr>
             <p:ph type="sldImg" idx="2"/>
@@ -1647,7 +1665,7 @@
             <a:spLocks noGrp="1"/>
           </p:cNvSpPr>
           <p:nvPr>
-            <p:ph type="body" idx="3" sz="quarter"/>
+            <p:ph type="body" sz="quarter" idx="3"/>
           </p:nvPr>
         </p:nvSpPr>
         <p:spPr/>
@@ -1668,7 +1686,7 @@
             <a:spLocks noGrp="1"/>
           </p:cNvSpPr>
           <p:nvPr>
-            <p:ph type="sldNum" idx="5" sz="quarter"/>
+            <p:ph type="sldNum" sz="quarter" idx="5"/>
           </p:nvPr>
         </p:nvSpPr>
         <p:spPr/>
@@ -1682,7 +1700,7 @@
 </file>
 
 <file path=ppt/notesSlides/notesSlide25.xml><?xml version="1.0" encoding="utf-8"?>
-<p:notes xmlns:a="http://schemas.openxmlformats.org/drawingml/2006/main" xmlns:p="http://schemas.openxmlformats.org/presentationml/2006/main" xmlns:r="http://schemas.openxmlformats.org/officeDocument/2006/relationships">
+<p:notes xmlns:a="http://schemas.openxmlformats.org/drawingml/2006/main" xmlns:r="http://schemas.openxmlformats.org/officeDocument/2006/relationships" xmlns:p="http://schemas.openxmlformats.org/presentationml/2006/main">
   <p:cSld>
     <p:spTree>
       <p:nvGrpSpPr>
@@ -1702,7 +1720,7 @@
         <p:nvSpPr>
           <p:cNvPr id="2" name="Slide Image Placeholder 1"/>
           <p:cNvSpPr>
-            <a:spLocks noGrp="1"/>
+            <a:spLocks noGrp="1" noRot="1" noChangeAspect="1"/>
           </p:cNvSpPr>
           <p:nvPr>
             <p:ph type="sldImg" idx="2"/>
@@ -1717,7 +1735,7 @@
             <a:spLocks noGrp="1"/>
           </p:cNvSpPr>
           <p:nvPr>
-            <p:ph type="body" idx="3" sz="quarter"/>
+            <p:ph type="body" sz="quarter" idx="3"/>
           </p:nvPr>
         </p:nvSpPr>
         <p:spPr/>
@@ -1738,7 +1756,7 @@
             <a:spLocks noGrp="1"/>
           </p:cNvSpPr>
           <p:nvPr>
-            <p:ph type="sldNum" idx="5" sz="quarter"/>
+            <p:ph type="sldNum" sz="quarter" idx="5"/>
           </p:nvPr>
         </p:nvSpPr>
         <p:spPr/>
@@ -1752,7 +1770,7 @@
 </file>
 
 <file path=ppt/notesSlides/notesSlide26.xml><?xml version="1.0" encoding="utf-8"?>
-<p:notes xmlns:a="http://schemas.openxmlformats.org/drawingml/2006/main" xmlns:p="http://schemas.openxmlformats.org/presentationml/2006/main" xmlns:r="http://schemas.openxmlformats.org/officeDocument/2006/relationships">
+<p:notes xmlns:a="http://schemas.openxmlformats.org/drawingml/2006/main" xmlns:r="http://schemas.openxmlformats.org/officeDocument/2006/relationships" xmlns:p="http://schemas.openxmlformats.org/presentationml/2006/main">
   <p:cSld>
     <p:spTree>
       <p:nvGrpSpPr>
@@ -1772,7 +1790,7 @@
         <p:nvSpPr>
           <p:cNvPr id="2" name="Slide Image Placeholder 1"/>
           <p:cNvSpPr>
-            <a:spLocks noGrp="1"/>
+            <a:spLocks noGrp="1" noRot="1" noChangeAspect="1"/>
           </p:cNvSpPr>
           <p:nvPr>
             <p:ph type="sldImg" idx="2"/>
@@ -1787,7 +1805,7 @@
             <a:spLocks noGrp="1"/>
           </p:cNvSpPr>
           <p:nvPr>
-            <p:ph type="body" idx="3" sz="quarter"/>
+            <p:ph type="body" sz="quarter" idx="3"/>
           </p:nvPr>
         </p:nvSpPr>
         <p:spPr/>
@@ -1808,7 +1826,7 @@
             <a:spLocks noGrp="1"/>
           </p:cNvSpPr>
           <p:nvPr>
-            <p:ph type="sldNum" idx="5" sz="quarter"/>
+            <p:ph type="sldNum" sz="quarter" idx="5"/>
           </p:nvPr>
         </p:nvSpPr>
         <p:spPr/>
@@ -1822,7 +1840,7 @@
 </file>
 
 <file path=ppt/notesSlides/notesSlide3.xml><?xml version="1.0" encoding="utf-8"?>
-<p:notes xmlns:a="http://schemas.openxmlformats.org/drawingml/2006/main" xmlns:p="http://schemas.openxmlformats.org/presentationml/2006/main" xmlns:r="http://schemas.openxmlformats.org/officeDocument/2006/relationships">
+<p:notes xmlns:a="http://schemas.openxmlformats.org/drawingml/2006/main" xmlns:r="http://schemas.openxmlformats.org/officeDocument/2006/relationships" xmlns:p="http://schemas.openxmlformats.org/presentationml/2006/main">
   <p:cSld>
     <p:spTree>
       <p:nvGrpSpPr>
@@ -1842,7 +1860,7 @@
         <p:nvSpPr>
           <p:cNvPr id="2" name="Slide Image Placeholder 1"/>
           <p:cNvSpPr>
-            <a:spLocks noGrp="1"/>
+            <a:spLocks noGrp="1" noRot="1" noChangeAspect="1"/>
           </p:cNvSpPr>
           <p:nvPr>
             <p:ph type="sldImg" idx="2"/>
@@ -1857,7 +1875,7 @@
             <a:spLocks noGrp="1"/>
           </p:cNvSpPr>
           <p:nvPr>
-            <p:ph type="body" idx="3" sz="quarter"/>
+            <p:ph type="body" sz="quarter" idx="3"/>
           </p:nvPr>
         </p:nvSpPr>
         <p:spPr/>
@@ -1878,7 +1896,7 @@
             <a:spLocks noGrp="1"/>
           </p:cNvSpPr>
           <p:nvPr>
-            <p:ph type="sldNum" idx="5" sz="quarter"/>
+            <p:ph type="sldNum" sz="quarter" idx="5"/>
           </p:nvPr>
         </p:nvSpPr>
         <p:spPr/>
@@ -1892,7 +1910,7 @@
 </file>
 
 <file path=ppt/notesSlides/notesSlide4.xml><?xml version="1.0" encoding="utf-8"?>
-<p:notes xmlns:a="http://schemas.openxmlformats.org/drawingml/2006/main" xmlns:p="http://schemas.openxmlformats.org/presentationml/2006/main" xmlns:r="http://schemas.openxmlformats.org/officeDocument/2006/relationships">
+<p:notes xmlns:a="http://schemas.openxmlformats.org/drawingml/2006/main" xmlns:r="http://schemas.openxmlformats.org/officeDocument/2006/relationships" xmlns:p="http://schemas.openxmlformats.org/presentationml/2006/main">
   <p:cSld>
     <p:spTree>
       <p:nvGrpSpPr>
@@ -1912,7 +1930,7 @@
         <p:nvSpPr>
           <p:cNvPr id="2" name="Slide Image Placeholder 1"/>
           <p:cNvSpPr>
-            <a:spLocks noGrp="1"/>
+            <a:spLocks noGrp="1" noRot="1" noChangeAspect="1"/>
           </p:cNvSpPr>
           <p:nvPr>
             <p:ph type="sldImg" idx="2"/>
@@ -1927,7 +1945,7 @@
             <a:spLocks noGrp="1"/>
           </p:cNvSpPr>
           <p:nvPr>
-            <p:ph type="body" idx="3" sz="quarter"/>
+            <p:ph type="body" sz="quarter" idx="3"/>
           </p:nvPr>
         </p:nvSpPr>
         <p:spPr/>
@@ -1948,7 +1966,7 @@
             <a:spLocks noGrp="1"/>
           </p:cNvSpPr>
           <p:nvPr>
-            <p:ph type="sldNum" idx="5" sz="quarter"/>
+            <p:ph type="sldNum" sz="quarter" idx="5"/>
           </p:nvPr>
         </p:nvSpPr>
         <p:spPr/>
@@ -1962,7 +1980,7 @@
 </file>
 
 <file path=ppt/notesSlides/notesSlide5.xml><?xml version="1.0" encoding="utf-8"?>
-<p:notes xmlns:a="http://schemas.openxmlformats.org/drawingml/2006/main" xmlns:p="http://schemas.openxmlformats.org/presentationml/2006/main" xmlns:r="http://schemas.openxmlformats.org/officeDocument/2006/relationships">
+<p:notes xmlns:a="http://schemas.openxmlformats.org/drawingml/2006/main" xmlns:r="http://schemas.openxmlformats.org/officeDocument/2006/relationships" xmlns:p="http://schemas.openxmlformats.org/presentationml/2006/main">
   <p:cSld>
     <p:spTree>
       <p:nvGrpSpPr>
@@ -1982,7 +2000,7 @@
         <p:nvSpPr>
           <p:cNvPr id="2" name="Slide Image Placeholder 1"/>
           <p:cNvSpPr>
-            <a:spLocks noGrp="1"/>
+            <a:spLocks noGrp="1" noRot="1" noChangeAspect="1"/>
           </p:cNvSpPr>
           <p:nvPr>
             <p:ph type="sldImg" idx="2"/>
@@ -1997,7 +2015,7 @@
             <a:spLocks noGrp="1"/>
           </p:cNvSpPr>
           <p:nvPr>
-            <p:ph type="body" idx="3" sz="quarter"/>
+            <p:ph type="body" sz="quarter" idx="3"/>
           </p:nvPr>
         </p:nvSpPr>
         <p:spPr/>
@@ -2018,7 +2036,7 @@
             <a:spLocks noGrp="1"/>
           </p:cNvSpPr>
           <p:nvPr>
-            <p:ph type="sldNum" idx="5" sz="quarter"/>
+            <p:ph type="sldNum" sz="quarter" idx="5"/>
           </p:nvPr>
         </p:nvSpPr>
         <p:spPr/>
@@ -2032,7 +2050,7 @@
 </file>
 
 <file path=ppt/notesSlides/notesSlide6.xml><?xml version="1.0" encoding="utf-8"?>
-<p:notes xmlns:a="http://schemas.openxmlformats.org/drawingml/2006/main" xmlns:p="http://schemas.openxmlformats.org/presentationml/2006/main" xmlns:r="http://schemas.openxmlformats.org/officeDocument/2006/relationships">
+<p:notes xmlns:a="http://schemas.openxmlformats.org/drawingml/2006/main" xmlns:r="http://schemas.openxmlformats.org/officeDocument/2006/relationships" xmlns:p="http://schemas.openxmlformats.org/presentationml/2006/main">
   <p:cSld>
     <p:spTree>
       <p:nvGrpSpPr>
@@ -2052,7 +2070,7 @@
         <p:nvSpPr>
           <p:cNvPr id="2" name="Slide Image Placeholder 1"/>
           <p:cNvSpPr>
-            <a:spLocks noGrp="1"/>
+            <a:spLocks noGrp="1" noRot="1" noChangeAspect="1"/>
           </p:cNvSpPr>
           <p:nvPr>
             <p:ph type="sldImg" idx="2"/>
@@ -2067,7 +2085,7 @@
             <a:spLocks noGrp="1"/>
           </p:cNvSpPr>
           <p:nvPr>
-            <p:ph type="body" idx="3" sz="quarter"/>
+            <p:ph type="body" sz="quarter" idx="3"/>
           </p:nvPr>
         </p:nvSpPr>
         <p:spPr/>
@@ -2088,7 +2106,7 @@
             <a:spLocks noGrp="1"/>
           </p:cNvSpPr>
           <p:nvPr>
-            <p:ph type="sldNum" idx="5" sz="quarter"/>
+            <p:ph type="sldNum" sz="quarter" idx="5"/>
           </p:nvPr>
         </p:nvSpPr>
         <p:spPr/>
@@ -2102,7 +2120,7 @@
 </file>
 
 <file path=ppt/notesSlides/notesSlide7.xml><?xml version="1.0" encoding="utf-8"?>
-<p:notes xmlns:a="http://schemas.openxmlformats.org/drawingml/2006/main" xmlns:p="http://schemas.openxmlformats.org/presentationml/2006/main" xmlns:r="http://schemas.openxmlformats.org/officeDocument/2006/relationships">
+<p:notes xmlns:a="http://schemas.openxmlformats.org/drawingml/2006/main" xmlns:r="http://schemas.openxmlformats.org/officeDocument/2006/relationships" xmlns:p="http://schemas.openxmlformats.org/presentationml/2006/main">
   <p:cSld>
     <p:spTree>
       <p:nvGrpSpPr>
@@ -2122,7 +2140,7 @@
         <p:nvSpPr>
           <p:cNvPr id="2" name="Slide Image Placeholder 1"/>
           <p:cNvSpPr>
-            <a:spLocks noGrp="1"/>
+            <a:spLocks noGrp="1" noRot="1" noChangeAspect="1"/>
           </p:cNvSpPr>
           <p:nvPr>
             <p:ph type="sldImg" idx="2"/>
@@ -2137,7 +2155,7 @@
             <a:spLocks noGrp="1"/>
           </p:cNvSpPr>
           <p:nvPr>
-            <p:ph type="body" idx="3" sz="quarter"/>
+            <p:ph type="body" sz="quarter" idx="3"/>
           </p:nvPr>
         </p:nvSpPr>
         <p:spPr/>
@@ -2158,7 +2176,7 @@
             <a:spLocks noGrp="1"/>
           </p:cNvSpPr>
           <p:nvPr>
-            <p:ph type="sldNum" idx="5" sz="quarter"/>
+            <p:ph type="sldNum" sz="quarter" idx="5"/>
           </p:nvPr>
         </p:nvSpPr>
         <p:spPr/>
@@ -2172,7 +2190,7 @@
 </file>
 
 <file path=ppt/notesSlides/notesSlide8.xml><?xml version="1.0" encoding="utf-8"?>
-<p:notes xmlns:a="http://schemas.openxmlformats.org/drawingml/2006/main" xmlns:p="http://schemas.openxmlformats.org/presentationml/2006/main" xmlns:r="http://schemas.openxmlformats.org/officeDocument/2006/relationships">
+<p:notes xmlns:a="http://schemas.openxmlformats.org/drawingml/2006/main" xmlns:r="http://schemas.openxmlformats.org/officeDocument/2006/relationships" xmlns:p="http://schemas.openxmlformats.org/presentationml/2006/main">
   <p:cSld>
     <p:spTree>
       <p:nvGrpSpPr>
@@ -2192,7 +2210,7 @@
         <p:nvSpPr>
           <p:cNvPr id="2" name="Slide Image Placeholder 1"/>
           <p:cNvSpPr>
-            <a:spLocks noGrp="1"/>
+            <a:spLocks noGrp="1" noRot="1" noChangeAspect="1"/>
           </p:cNvSpPr>
           <p:nvPr>
             <p:ph type="sldImg" idx="2"/>
@@ -2207,7 +2225,7 @@
             <a:spLocks noGrp="1"/>
           </p:cNvSpPr>
           <p:nvPr>
-            <p:ph type="body" idx="3" sz="quarter"/>
+            <p:ph type="body" sz="quarter" idx="3"/>
           </p:nvPr>
         </p:nvSpPr>
         <p:spPr/>
@@ -2228,7 +2246,7 @@
             <a:spLocks noGrp="1"/>
           </p:cNvSpPr>
           <p:nvPr>
-            <p:ph type="sldNum" idx="5" sz="quarter"/>
+            <p:ph type="sldNum" sz="quarter" idx="5"/>
           </p:nvPr>
         </p:nvSpPr>
         <p:spPr/>
@@ -2242,7 +2260,7 @@
 </file>
 
 <file path=ppt/notesSlides/notesSlide9.xml><?xml version="1.0" encoding="utf-8"?>
-<p:notes xmlns:a="http://schemas.openxmlformats.org/drawingml/2006/main" xmlns:p="http://schemas.openxmlformats.org/presentationml/2006/main" xmlns:r="http://schemas.openxmlformats.org/officeDocument/2006/relationships">
+<p:notes xmlns:a="http://schemas.openxmlformats.org/drawingml/2006/main" xmlns:r="http://schemas.openxmlformats.org/officeDocument/2006/relationships" xmlns:p="http://schemas.openxmlformats.org/presentationml/2006/main">
   <p:cSld>
     <p:spTree>
       <p:nvGrpSpPr>
@@ -2262,7 +2280,7 @@
         <p:nvSpPr>
           <p:cNvPr id="2" name="Slide Image Placeholder 1"/>
           <p:cNvSpPr>
-            <a:spLocks noGrp="1"/>
+            <a:spLocks noGrp="1" noRot="1" noChangeAspect="1"/>
           </p:cNvSpPr>
           <p:nvPr>
             <p:ph type="sldImg" idx="2"/>
@@ -2277,7 +2295,7 @@
             <a:spLocks noGrp="1"/>
           </p:cNvSpPr>
           <p:nvPr>
-            <p:ph type="body" idx="3" sz="quarter"/>
+            <p:ph type="body" sz="quarter" idx="3"/>
           </p:nvPr>
         </p:nvSpPr>
         <p:spPr/>
@@ -2298,7 +2316,7 @@
             <a:spLocks noGrp="1"/>
           </p:cNvSpPr>
           <p:nvPr>
-            <p:ph type="sldNum" idx="5" sz="quarter"/>
+            <p:ph type="sldNum" sz="quarter" idx="5"/>
           </p:nvPr>
         </p:nvSpPr>
         <p:spPr/>
@@ -2349,10 +2367,9 @@
           <a:lstStyle/>
           <a:p>
             <a:r>
-              <a:rPr lang="en-US" smtClean="0"/>
+              <a:rPr lang="en-US"/>
               <a:t>Click to edit Master title style</a:t>
             </a:r>
-            <a:endParaRPr lang="en-US"/>
           </a:p>
         </p:txBody>
       </p:sp>
@@ -2468,10 +2485,9 @@
           </a:lstStyle>
           <a:p>
             <a:r>
-              <a:rPr lang="en-US" smtClean="0"/>
+              <a:rPr lang="en-US"/>
               <a:t>Click to edit Master subtitle style</a:t>
             </a:r>
-            <a:endParaRPr lang="en-US"/>
           </a:p>
         </p:txBody>
       </p:sp>
@@ -2492,7 +2508,7 @@
           <a:p>
             <a:fld id="{5BCAD085-E8A6-8845-BD4E-CB4CCA059FC4}" type="datetimeFigureOut">
               <a:rPr lang="en-US" smtClean="0"/>
-              <a:t>1/27/13</a:t>
+              <a:t>10/29/2026</a:t>
             </a:fld>
             <a:endParaRPr lang="en-US"/>
           </a:p>
@@ -2586,10 +2602,9 @@
           <a:lstStyle/>
           <a:p>
             <a:r>
-              <a:rPr lang="en-US" smtClean="0"/>
+              <a:rPr lang="en-US"/>
               <a:t>Click to edit Master title style</a:t>
             </a:r>
-            <a:endParaRPr lang="en-US"/>
           </a:p>
         </p:txBody>
       </p:sp>
@@ -2610,38 +2625,37 @@
           <a:p>
             <a:pPr lvl="0"/>
             <a:r>
-              <a:rPr lang="en-US" smtClean="0"/>
+              <a:rPr lang="en-US"/>
               <a:t>Click to edit Master text styles</a:t>
             </a:r>
           </a:p>
           <a:p>
             <a:pPr lvl="1"/>
             <a:r>
-              <a:rPr lang="en-US" smtClean="0"/>
+              <a:rPr lang="en-US"/>
               <a:t>Second level</a:t>
             </a:r>
           </a:p>
           <a:p>
             <a:pPr lvl="2"/>
             <a:r>
-              <a:rPr lang="en-US" smtClean="0"/>
+              <a:rPr lang="en-US"/>
               <a:t>Third level</a:t>
             </a:r>
           </a:p>
           <a:p>
             <a:pPr lvl="3"/>
             <a:r>
-              <a:rPr lang="en-US" smtClean="0"/>
+              <a:rPr lang="en-US"/>
               <a:t>Fourth level</a:t>
             </a:r>
           </a:p>
           <a:p>
             <a:pPr lvl="4"/>
             <a:r>
-              <a:rPr lang="en-US" smtClean="0"/>
+              <a:rPr lang="en-US"/>
               <a:t>Fifth level</a:t>
             </a:r>
-            <a:endParaRPr lang="en-US"/>
           </a:p>
         </p:txBody>
       </p:sp>
@@ -2662,7 +2676,7 @@
           <a:p>
             <a:fld id="{5BCAD085-E8A6-8845-BD4E-CB4CCA059FC4}" type="datetimeFigureOut">
               <a:rPr lang="en-US" smtClean="0"/>
-              <a:t>1/27/13</a:t>
+              <a:t>10/29/2026</a:t>
             </a:fld>
             <a:endParaRPr lang="en-US"/>
           </a:p>
@@ -2761,10 +2775,9 @@
           <a:lstStyle/>
           <a:p>
             <a:r>
-              <a:rPr lang="en-US" smtClean="0"/>
+              <a:rPr lang="en-US"/>
               <a:t>Click to edit Master title style</a:t>
             </a:r>
-            <a:endParaRPr lang="en-US"/>
           </a:p>
         </p:txBody>
       </p:sp>
@@ -2790,38 +2803,37 @@
           <a:p>
             <a:pPr lvl="0"/>
             <a:r>
-              <a:rPr lang="en-US" smtClean="0"/>
+              <a:rPr lang="en-US"/>
               <a:t>Click to edit Master text styles</a:t>
             </a:r>
           </a:p>
           <a:p>
             <a:pPr lvl="1"/>
             <a:r>
-              <a:rPr lang="en-US" smtClean="0"/>
+              <a:rPr lang="en-US"/>
               <a:t>Second level</a:t>
             </a:r>
           </a:p>
           <a:p>
             <a:pPr lvl="2"/>
             <a:r>
-              <a:rPr lang="en-US" smtClean="0"/>
+              <a:rPr lang="en-US"/>
               <a:t>Third level</a:t>
             </a:r>
           </a:p>
           <a:p>
             <a:pPr lvl="3"/>
             <a:r>
-              <a:rPr lang="en-US" smtClean="0"/>
+              <a:rPr lang="en-US"/>
               <a:t>Fourth level</a:t>
             </a:r>
           </a:p>
           <a:p>
             <a:pPr lvl="4"/>
             <a:r>
-              <a:rPr lang="en-US" smtClean="0"/>
+              <a:rPr lang="en-US"/>
               <a:t>Fifth level</a:t>
             </a:r>
-            <a:endParaRPr lang="en-US"/>
           </a:p>
         </p:txBody>
       </p:sp>
@@ -2842,7 +2854,7 @@
           <a:p>
             <a:fld id="{5BCAD085-E8A6-8845-BD4E-CB4CCA059FC4}" type="datetimeFigureOut">
               <a:rPr lang="en-US" smtClean="0"/>
-              <a:t>1/27/13</a:t>
+              <a:t>10/29/2026</a:t>
             </a:fld>
             <a:endParaRPr lang="en-US"/>
           </a:p>
@@ -2936,10 +2948,9 @@
           <a:lstStyle/>
           <a:p>
             <a:r>
-              <a:rPr lang="en-US" smtClean="0"/>
+              <a:rPr lang="en-US"/>
               <a:t>Click to edit Master title style</a:t>
             </a:r>
-            <a:endParaRPr lang="en-US"/>
           </a:p>
         </p:txBody>
       </p:sp>
@@ -2960,38 +2971,37 @@
           <a:p>
             <a:pPr lvl="0"/>
             <a:r>
-              <a:rPr lang="en-US" smtClean="0"/>
+              <a:rPr lang="en-US"/>
               <a:t>Click to edit Master text styles</a:t>
             </a:r>
           </a:p>
           <a:p>
             <a:pPr lvl="1"/>
             <a:r>
-              <a:rPr lang="en-US" smtClean="0"/>
+              <a:rPr lang="en-US"/>
               <a:t>Second level</a:t>
             </a:r>
           </a:p>
           <a:p>
             <a:pPr lvl="2"/>
             <a:r>
-              <a:rPr lang="en-US" smtClean="0"/>
+              <a:rPr lang="en-US"/>
               <a:t>Third level</a:t>
             </a:r>
           </a:p>
           <a:p>
             <a:pPr lvl="3"/>
             <a:r>
-              <a:rPr lang="en-US" smtClean="0"/>
+              <a:rPr lang="en-US"/>
               <a:t>Fourth level</a:t>
             </a:r>
           </a:p>
           <a:p>
             <a:pPr lvl="4"/>
             <a:r>
-              <a:rPr lang="en-US" smtClean="0"/>
+              <a:rPr lang="en-US"/>
               <a:t>Fifth level</a:t>
             </a:r>
-            <a:endParaRPr lang="en-US"/>
           </a:p>
         </p:txBody>
       </p:sp>
@@ -3012,7 +3022,7 @@
           <a:p>
             <a:fld id="{5BCAD085-E8A6-8845-BD4E-CB4CCA059FC4}" type="datetimeFigureOut">
               <a:rPr lang="en-US" smtClean="0"/>
-              <a:t>1/27/13</a:t>
+              <a:t>10/29/2026</a:t>
             </a:fld>
             <a:endParaRPr lang="en-US"/>
           </a:p>
@@ -3115,10 +3125,9 @@
           </a:lstStyle>
           <a:p>
             <a:r>
-              <a:rPr lang="en-US" smtClean="0"/>
+              <a:rPr lang="en-US"/>
               <a:t>Click to edit Master title style</a:t>
             </a:r>
-            <a:endParaRPr lang="en-US"/>
           </a:p>
         </p:txBody>
       </p:sp>
@@ -3235,7 +3244,7 @@
           <a:p>
             <a:pPr lvl="0"/>
             <a:r>
-              <a:rPr lang="en-US" smtClean="0"/>
+              <a:rPr lang="en-US"/>
               <a:t>Click to edit Master text styles</a:t>
             </a:r>
           </a:p>
@@ -3258,7 +3267,7 @@
           <a:p>
             <a:fld id="{5BCAD085-E8A6-8845-BD4E-CB4CCA059FC4}" type="datetimeFigureOut">
               <a:rPr lang="en-US" smtClean="0"/>
-              <a:t>1/27/13</a:t>
+              <a:t>10/29/2026</a:t>
             </a:fld>
             <a:endParaRPr lang="en-US"/>
           </a:p>
@@ -3352,10 +3361,9 @@
           <a:lstStyle/>
           <a:p>
             <a:r>
-              <a:rPr lang="en-US" smtClean="0"/>
+              <a:rPr lang="en-US"/>
               <a:t>Click to edit Master title style</a:t>
             </a:r>
-            <a:endParaRPr lang="en-US"/>
           </a:p>
         </p:txBody>
       </p:sp>
@@ -3409,38 +3417,37 @@
           <a:p>
             <a:pPr lvl="0"/>
             <a:r>
-              <a:rPr lang="en-US" smtClean="0"/>
+              <a:rPr lang="en-US"/>
               <a:t>Click to edit Master text styles</a:t>
             </a:r>
           </a:p>
           <a:p>
             <a:pPr lvl="1"/>
             <a:r>
-              <a:rPr lang="en-US" smtClean="0"/>
+              <a:rPr lang="en-US"/>
               <a:t>Second level</a:t>
             </a:r>
           </a:p>
           <a:p>
             <a:pPr lvl="2"/>
             <a:r>
-              <a:rPr lang="en-US" smtClean="0"/>
+              <a:rPr lang="en-US"/>
               <a:t>Third level</a:t>
             </a:r>
           </a:p>
           <a:p>
             <a:pPr lvl="3"/>
             <a:r>
-              <a:rPr lang="en-US" smtClean="0"/>
+              <a:rPr lang="en-US"/>
               <a:t>Fourth level</a:t>
             </a:r>
           </a:p>
           <a:p>
             <a:pPr lvl="4"/>
             <a:r>
-              <a:rPr lang="en-US" smtClean="0"/>
+              <a:rPr lang="en-US"/>
               <a:t>Fifth level</a:t>
             </a:r>
-            <a:endParaRPr lang="en-US"/>
           </a:p>
         </p:txBody>
       </p:sp>
@@ -3494,38 +3501,37 @@
           <a:p>
             <a:pPr lvl="0"/>
             <a:r>
-              <a:rPr lang="en-US" smtClean="0"/>
+              <a:rPr lang="en-US"/>
               <a:t>Click to edit Master text styles</a:t>
             </a:r>
           </a:p>
           <a:p>
             <a:pPr lvl="1"/>
             <a:r>
-              <a:rPr lang="en-US" smtClean="0"/>
+              <a:rPr lang="en-US"/>
               <a:t>Second level</a:t>
             </a:r>
           </a:p>
           <a:p>
             <a:pPr lvl="2"/>
             <a:r>
-              <a:rPr lang="en-US" smtClean="0"/>
+              <a:rPr lang="en-US"/>
               <a:t>Third level</a:t>
             </a:r>
           </a:p>
           <a:p>
             <a:pPr lvl="3"/>
             <a:r>
-              <a:rPr lang="en-US" smtClean="0"/>
+              <a:rPr lang="en-US"/>
               <a:t>Fourth level</a:t>
             </a:r>
           </a:p>
           <a:p>
             <a:pPr lvl="4"/>
             <a:r>
-              <a:rPr lang="en-US" smtClean="0"/>
+              <a:rPr lang="en-US"/>
               <a:t>Fifth level</a:t>
             </a:r>
-            <a:endParaRPr lang="en-US"/>
           </a:p>
         </p:txBody>
       </p:sp>
@@ -3546,7 +3552,7 @@
           <a:p>
             <a:fld id="{5BCAD085-E8A6-8845-BD4E-CB4CCA059FC4}" type="datetimeFigureOut">
               <a:rPr lang="en-US" smtClean="0"/>
-              <a:t>1/27/13</a:t>
+              <a:t>10/29/2026</a:t>
             </a:fld>
             <a:endParaRPr lang="en-US"/>
           </a:p>
@@ -3644,10 +3650,9 @@
           </a:lstStyle>
           <a:p>
             <a:r>
-              <a:rPr lang="en-US" smtClean="0"/>
+              <a:rPr lang="en-US"/>
               <a:t>Click to edit Master title style</a:t>
             </a:r>
-            <a:endParaRPr lang="en-US"/>
           </a:p>
         </p:txBody>
       </p:sp>
@@ -3710,7 +3715,7 @@
           <a:p>
             <a:pPr lvl="0"/>
             <a:r>
-              <a:rPr lang="en-US" smtClean="0"/>
+              <a:rPr lang="en-US"/>
               <a:t>Click to edit Master text styles</a:t>
             </a:r>
           </a:p>
@@ -3766,38 +3771,37 @@
           <a:p>
             <a:pPr lvl="0"/>
             <a:r>
-              <a:rPr lang="en-US" smtClean="0"/>
+              <a:rPr lang="en-US"/>
               <a:t>Click to edit Master text styles</a:t>
             </a:r>
           </a:p>
           <a:p>
             <a:pPr lvl="1"/>
             <a:r>
-              <a:rPr lang="en-US" smtClean="0"/>
+              <a:rPr lang="en-US"/>
               <a:t>Second level</a:t>
             </a:r>
           </a:p>
           <a:p>
             <a:pPr lvl="2"/>
             <a:r>
-              <a:rPr lang="en-US" smtClean="0"/>
+              <a:rPr lang="en-US"/>
               <a:t>Third level</a:t>
             </a:r>
           </a:p>
           <a:p>
             <a:pPr lvl="3"/>
             <a:r>
-              <a:rPr lang="en-US" smtClean="0"/>
+              <a:rPr lang="en-US"/>
               <a:t>Fourth level</a:t>
             </a:r>
           </a:p>
           <a:p>
             <a:pPr lvl="4"/>
             <a:r>
-              <a:rPr lang="en-US" smtClean="0"/>
+              <a:rPr lang="en-US"/>
               <a:t>Fifth level</a:t>
             </a:r>
-            <a:endParaRPr lang="en-US"/>
           </a:p>
         </p:txBody>
       </p:sp>
@@ -3860,7 +3864,7 @@
           <a:p>
             <a:pPr lvl="0"/>
             <a:r>
-              <a:rPr lang="en-US" smtClean="0"/>
+              <a:rPr lang="en-US"/>
               <a:t>Click to edit Master text styles</a:t>
             </a:r>
           </a:p>
@@ -3916,38 +3920,37 @@
           <a:p>
             <a:pPr lvl="0"/>
             <a:r>
-              <a:rPr lang="en-US" smtClean="0"/>
+              <a:rPr lang="en-US"/>
               <a:t>Click to edit Master text styles</a:t>
             </a:r>
           </a:p>
           <a:p>
             <a:pPr lvl="1"/>
             <a:r>
-              <a:rPr lang="en-US" smtClean="0"/>
+              <a:rPr lang="en-US"/>
               <a:t>Second level</a:t>
             </a:r>
           </a:p>
           <a:p>
             <a:pPr lvl="2"/>
             <a:r>
-              <a:rPr lang="en-US" smtClean="0"/>
+              <a:rPr lang="en-US"/>
               <a:t>Third level</a:t>
             </a:r>
           </a:p>
           <a:p>
             <a:pPr lvl="3"/>
             <a:r>
-              <a:rPr lang="en-US" smtClean="0"/>
+              <a:rPr lang="en-US"/>
               <a:t>Fourth level</a:t>
             </a:r>
           </a:p>
           <a:p>
             <a:pPr lvl="4"/>
             <a:r>
-              <a:rPr lang="en-US" smtClean="0"/>
+              <a:rPr lang="en-US"/>
               <a:t>Fifth level</a:t>
             </a:r>
-            <a:endParaRPr lang="en-US"/>
           </a:p>
         </p:txBody>
       </p:sp>
@@ -3968,7 +3971,7 @@
           <a:p>
             <a:fld id="{5BCAD085-E8A6-8845-BD4E-CB4CCA059FC4}" type="datetimeFigureOut">
               <a:rPr lang="en-US" smtClean="0"/>
-              <a:t>1/27/13</a:t>
+              <a:t>10/29/2026</a:t>
             </a:fld>
             <a:endParaRPr lang="en-US"/>
           </a:p>
@@ -4062,10 +4065,9 @@
           <a:lstStyle/>
           <a:p>
             <a:r>
-              <a:rPr lang="en-US" smtClean="0"/>
+              <a:rPr lang="en-US"/>
               <a:t>Click to edit Master title style</a:t>
             </a:r>
-            <a:endParaRPr lang="en-US"/>
           </a:p>
         </p:txBody>
       </p:sp>
@@ -4086,7 +4088,7 @@
           <a:p>
             <a:fld id="{5BCAD085-E8A6-8845-BD4E-CB4CCA059FC4}" type="datetimeFigureOut">
               <a:rPr lang="en-US" smtClean="0"/>
-              <a:t>1/27/13</a:t>
+              <a:t>10/29/2026</a:t>
             </a:fld>
             <a:endParaRPr lang="en-US"/>
           </a:p>
@@ -4181,7 +4183,7 @@
           <a:p>
             <a:fld id="{5BCAD085-E8A6-8845-BD4E-CB4CCA059FC4}" type="datetimeFigureOut">
               <a:rPr lang="en-US" smtClean="0"/>
-              <a:t>1/27/13</a:t>
+              <a:t>10/29/2026</a:t>
             </a:fld>
             <a:endParaRPr lang="en-US"/>
           </a:p>
@@ -4284,10 +4286,9 @@
           </a:lstStyle>
           <a:p>
             <a:r>
-              <a:rPr lang="en-US" smtClean="0"/>
+              <a:rPr lang="en-US"/>
               <a:t>Click to edit Master title style</a:t>
             </a:r>
-            <a:endParaRPr lang="en-US"/>
           </a:p>
         </p:txBody>
       </p:sp>
@@ -4341,38 +4342,37 @@
           <a:p>
             <a:pPr lvl="0"/>
             <a:r>
-              <a:rPr lang="en-US" smtClean="0"/>
+              <a:rPr lang="en-US"/>
               <a:t>Click to edit Master text styles</a:t>
             </a:r>
           </a:p>
           <a:p>
             <a:pPr lvl="1"/>
             <a:r>
-              <a:rPr lang="en-US" smtClean="0"/>
+              <a:rPr lang="en-US"/>
               <a:t>Second level</a:t>
             </a:r>
           </a:p>
           <a:p>
             <a:pPr lvl="2"/>
             <a:r>
-              <a:rPr lang="en-US" smtClean="0"/>
+              <a:rPr lang="en-US"/>
               <a:t>Third level</a:t>
             </a:r>
           </a:p>
           <a:p>
             <a:pPr lvl="3"/>
             <a:r>
-              <a:rPr lang="en-US" smtClean="0"/>
+              <a:rPr lang="en-US"/>
               <a:t>Fourth level</a:t>
             </a:r>
           </a:p>
           <a:p>
             <a:pPr lvl="4"/>
             <a:r>
-              <a:rPr lang="en-US" smtClean="0"/>
+              <a:rPr lang="en-US"/>
               <a:t>Fifth level</a:t>
             </a:r>
-            <a:endParaRPr lang="en-US"/>
           </a:p>
         </p:txBody>
       </p:sp>
@@ -4435,7 +4435,7 @@
           <a:p>
             <a:pPr lvl="0"/>
             <a:r>
-              <a:rPr lang="en-US" smtClean="0"/>
+              <a:rPr lang="en-US"/>
               <a:t>Click to edit Master text styles</a:t>
             </a:r>
           </a:p>
@@ -4458,7 +4458,7 @@
           <a:p>
             <a:fld id="{5BCAD085-E8A6-8845-BD4E-CB4CCA059FC4}" type="datetimeFigureOut">
               <a:rPr lang="en-US" smtClean="0"/>
-              <a:t>1/27/13</a:t>
+              <a:t>10/29/2026</a:t>
             </a:fld>
             <a:endParaRPr lang="en-US"/>
           </a:p>
@@ -4561,10 +4561,9 @@
           </a:lstStyle>
           <a:p>
             <a:r>
-              <a:rPr lang="en-US" smtClean="0"/>
+              <a:rPr lang="en-US"/>
               <a:t>Click to edit Master title style</a:t>
             </a:r>
-            <a:endParaRPr lang="en-US"/>
           </a:p>
         </p:txBody>
       </p:sp>
@@ -4688,7 +4687,7 @@
           <a:p>
             <a:pPr lvl="0"/>
             <a:r>
-              <a:rPr lang="en-US" smtClean="0"/>
+              <a:rPr lang="en-US"/>
               <a:t>Click to edit Master text styles</a:t>
             </a:r>
           </a:p>
@@ -4711,7 +4710,7 @@
           <a:p>
             <a:fld id="{5BCAD085-E8A6-8845-BD4E-CB4CCA059FC4}" type="datetimeFigureOut">
               <a:rPr lang="en-US" smtClean="0"/>
-              <a:t>1/27/13</a:t>
+              <a:t>10/29/2026</a:t>
             </a:fld>
             <a:endParaRPr lang="en-US"/>
           </a:p>
@@ -4820,10 +4819,9 @@
           <a:lstStyle/>
           <a:p>
             <a:r>
-              <a:rPr lang="en-US" smtClean="0"/>
+              <a:rPr lang="en-US"/>
               <a:t>Click to edit Master title style</a:t>
             </a:r>
-            <a:endParaRPr lang="en-US"/>
           </a:p>
         </p:txBody>
       </p:sp>
@@ -4854,38 +4852,37 @@
           <a:p>
             <a:pPr lvl="0"/>
             <a:r>
-              <a:rPr lang="en-US" smtClean="0"/>
+              <a:rPr lang="en-US"/>
               <a:t>Click to edit Master text styles</a:t>
             </a:r>
           </a:p>
           <a:p>
             <a:pPr lvl="1"/>
             <a:r>
-              <a:rPr lang="en-US" smtClean="0"/>
+              <a:rPr lang="en-US"/>
               <a:t>Second level</a:t>
             </a:r>
           </a:p>
           <a:p>
             <a:pPr lvl="2"/>
             <a:r>
-              <a:rPr lang="en-US" smtClean="0"/>
+              <a:rPr lang="en-US"/>
               <a:t>Third level</a:t>
             </a:r>
           </a:p>
           <a:p>
             <a:pPr lvl="3"/>
             <a:r>
-              <a:rPr lang="en-US" smtClean="0"/>
+              <a:rPr lang="en-US"/>
               <a:t>Fourth level</a:t>
             </a:r>
           </a:p>
           <a:p>
             <a:pPr lvl="4"/>
             <a:r>
-              <a:rPr lang="en-US" smtClean="0"/>
+              <a:rPr lang="en-US"/>
               <a:t>Fifth level</a:t>
             </a:r>
-            <a:endParaRPr lang="en-US"/>
           </a:p>
         </p:txBody>
       </p:sp>
@@ -4924,7 +4921,7 @@
           <a:p>
             <a:fld id="{5BCAD085-E8A6-8845-BD4E-CB4CCA059FC4}" type="datetimeFigureOut">
               <a:rPr lang="en-US" smtClean="0"/>
-              <a:t>1/27/13</a:t>
+              <a:t>10/29/2026</a:t>
             </a:fld>
             <a:endParaRPr lang="en-US"/>
           </a:p>
@@ -5283,7 +5280,7 @@
 </file>
 
 <file path=ppt/slides/slide1.xml><?xml version="1.0" encoding="utf-8"?>
-<p:sld xmlns:a="http://schemas.openxmlformats.org/drawingml/2006/main" xmlns:p="http://schemas.openxmlformats.org/presentationml/2006/main" xmlns:r="http://schemas.openxmlformats.org/officeDocument/2006/relationships">
+<p:sld xmlns:a="http://schemas.openxmlformats.org/drawingml/2006/main" xmlns:r="http://schemas.openxmlformats.org/officeDocument/2006/relationships" xmlns:p="http://schemas.openxmlformats.org/presentationml/2006/main">
   <p:cSld>
     <p:spTree>
       <p:nvGrpSpPr>
@@ -5291,7 +5288,14 @@
         <p:cNvGrpSpPr/>
         <p:nvPr/>
       </p:nvGrpSpPr>
-      <p:grpSpPr/>
+      <p:grpSpPr>
+        <a:xfrm>
+          <a:off x="0" y="0"/>
+          <a:ext cx="0" cy="0"/>
+          <a:chOff x="0" y="0"/>
+          <a:chExt cx="0" cy="0"/>
+        </a:xfrm>
+      </p:grpSpPr>
       <p:sp>
         <p:nvSpPr>
           <p:cNvPr id="2" name="Rectangle 1"/>
@@ -5333,6 +5337,7 @@
           <a:lstStyle/>
           <a:p>
             <a:pPr algn="ctr"/>
+            <a:endParaRPr/>
           </a:p>
         </p:txBody>
       </p:sp>
@@ -5377,6 +5382,7 @@
           <a:lstStyle/>
           <a:p>
             <a:pPr algn="ctr"/>
+            <a:endParaRPr/>
           </a:p>
         </p:txBody>
       </p:sp>
@@ -5421,6 +5427,7 @@
           <a:lstStyle/>
           <a:p>
             <a:pPr algn="ctr"/>
+            <a:endParaRPr/>
           </a:p>
         </p:txBody>
       </p:sp>
@@ -5472,7 +5479,7 @@
         <p:spPr>
           <a:xfrm>
             <a:off x="731520" y="2377440"/>
-            <a:ext cx="10698480" cy="1554480"/>
+            <a:ext cx="10698480" cy="615553"/>
           </a:xfrm>
           <a:prstGeom prst="rect">
             <a:avLst/>
@@ -5491,7 +5498,7 @@
               </a:spcAft>
             </a:pPr>
             <a:r>
-              <a:rPr sz="3400" b="1">
+              <a:rPr sz="3400" b="1" dirty="0">
                 <a:solidFill>
                   <a:srgbClr val="C0392B"/>
                 </a:solidFill>
@@ -5499,6 +5506,30 @@
               </a:rPr>
               <a:t>RAC</a:t>
             </a:r>
+            <a:r>
+              <a:rPr lang="en-US" sz="3400" b="1" dirty="0">
+                <a:solidFill>
+                  <a:srgbClr val="C0392B"/>
+                </a:solidFill>
+                <a:latin typeface="맑은 고딕"/>
+              </a:rPr>
+              <a:t> </a:t>
+            </a:r>
+            <a:r>
+              <a:rPr lang="ko-KR" altLang="en-US" sz="3400" b="1" dirty="0">
+                <a:solidFill>
+                  <a:srgbClr val="C0392B"/>
+                </a:solidFill>
+                <a:latin typeface="맑은 고딕"/>
+              </a:rPr>
+              <a:t>스토리지 관리</a:t>
+            </a:r>
+            <a:endParaRPr sz="3400" b="1" dirty="0">
+              <a:solidFill>
+                <a:srgbClr val="C0392B"/>
+              </a:solidFill>
+              <a:latin typeface="맑은 고딕"/>
+            </a:endParaRPr>
           </a:p>
         </p:txBody>
       </p:sp>
@@ -5589,7 +5620,7 @@
 </file>
 
 <file path=ppt/slides/slide10.xml><?xml version="1.0" encoding="utf-8"?>
-<p:sld xmlns:a="http://schemas.openxmlformats.org/drawingml/2006/main" xmlns:p="http://schemas.openxmlformats.org/presentationml/2006/main" xmlns:r="http://schemas.openxmlformats.org/officeDocument/2006/relationships">
+<p:sld xmlns:a="http://schemas.openxmlformats.org/drawingml/2006/main" xmlns:r="http://schemas.openxmlformats.org/officeDocument/2006/relationships" xmlns:p="http://schemas.openxmlformats.org/presentationml/2006/main">
   <p:cSld>
     <p:spTree>
       <p:nvGrpSpPr>
@@ -5597,7 +5628,14 @@
         <p:cNvGrpSpPr/>
         <p:nvPr/>
       </p:nvGrpSpPr>
-      <p:grpSpPr/>
+      <p:grpSpPr>
+        <a:xfrm>
+          <a:off x="0" y="0"/>
+          <a:ext cx="0" cy="0"/>
+          <a:chOff x="0" y="0"/>
+          <a:chExt cx="0" cy="0"/>
+        </a:xfrm>
+      </p:grpSpPr>
       <p:sp>
         <p:nvSpPr>
           <p:cNvPr id="2" name="Rectangle 1"/>
@@ -5639,6 +5677,7 @@
           <a:lstStyle/>
           <a:p>
             <a:pPr algn="ctr"/>
+            <a:endParaRPr/>
           </a:p>
         </p:txBody>
       </p:sp>
@@ -5832,7 +5871,7 @@
 </file>
 
 <file path=ppt/slides/slide11.xml><?xml version="1.0" encoding="utf-8"?>
-<p:sld xmlns:a="http://schemas.openxmlformats.org/drawingml/2006/main" xmlns:p="http://schemas.openxmlformats.org/presentationml/2006/main" xmlns:r="http://schemas.openxmlformats.org/officeDocument/2006/relationships">
+<p:sld xmlns:a="http://schemas.openxmlformats.org/drawingml/2006/main" xmlns:r="http://schemas.openxmlformats.org/officeDocument/2006/relationships" xmlns:p="http://schemas.openxmlformats.org/presentationml/2006/main">
   <p:cSld>
     <p:spTree>
       <p:nvGrpSpPr>
@@ -5840,7 +5879,14 @@
         <p:cNvGrpSpPr/>
         <p:nvPr/>
       </p:nvGrpSpPr>
-      <p:grpSpPr/>
+      <p:grpSpPr>
+        <a:xfrm>
+          <a:off x="0" y="0"/>
+          <a:ext cx="0" cy="0"/>
+          <a:chOff x="0" y="0"/>
+          <a:chExt cx="0" cy="0"/>
+        </a:xfrm>
+      </p:grpSpPr>
       <p:sp>
         <p:nvSpPr>
           <p:cNvPr id="2" name="Rectangle 1"/>
@@ -5882,6 +5928,7 @@
           <a:lstStyle/>
           <a:p>
             <a:pPr algn="ctr"/>
+            <a:endParaRPr/>
           </a:p>
         </p:txBody>
       </p:sp>
@@ -6075,7 +6122,7 @@
 </file>
 
 <file path=ppt/slides/slide12.xml><?xml version="1.0" encoding="utf-8"?>
-<p:sld xmlns:a="http://schemas.openxmlformats.org/drawingml/2006/main" xmlns:p="http://schemas.openxmlformats.org/presentationml/2006/main" xmlns:r="http://schemas.openxmlformats.org/officeDocument/2006/relationships">
+<p:sld xmlns:a="http://schemas.openxmlformats.org/drawingml/2006/main" xmlns:r="http://schemas.openxmlformats.org/officeDocument/2006/relationships" xmlns:p="http://schemas.openxmlformats.org/presentationml/2006/main">
   <p:cSld>
     <p:spTree>
       <p:nvGrpSpPr>
@@ -6083,7 +6130,14 @@
         <p:cNvGrpSpPr/>
         <p:nvPr/>
       </p:nvGrpSpPr>
-      <p:grpSpPr/>
+      <p:grpSpPr>
+        <a:xfrm>
+          <a:off x="0" y="0"/>
+          <a:ext cx="0" cy="0"/>
+          <a:chOff x="0" y="0"/>
+          <a:chExt cx="0" cy="0"/>
+        </a:xfrm>
+      </p:grpSpPr>
       <p:sp>
         <p:nvSpPr>
           <p:cNvPr id="2" name="Rectangle 1"/>
@@ -6125,6 +6179,7 @@
           <a:lstStyle/>
           <a:p>
             <a:pPr algn="ctr"/>
+            <a:endParaRPr/>
           </a:p>
         </p:txBody>
       </p:sp>
@@ -6318,7 +6373,7 @@
 </file>
 
 <file path=ppt/slides/slide13.xml><?xml version="1.0" encoding="utf-8"?>
-<p:sld xmlns:a="http://schemas.openxmlformats.org/drawingml/2006/main" xmlns:p="http://schemas.openxmlformats.org/presentationml/2006/main" xmlns:r="http://schemas.openxmlformats.org/officeDocument/2006/relationships">
+<p:sld xmlns:a="http://schemas.openxmlformats.org/drawingml/2006/main" xmlns:r="http://schemas.openxmlformats.org/officeDocument/2006/relationships" xmlns:p="http://schemas.openxmlformats.org/presentationml/2006/main">
   <p:cSld>
     <p:spTree>
       <p:nvGrpSpPr>
@@ -6326,7 +6381,14 @@
         <p:cNvGrpSpPr/>
         <p:nvPr/>
       </p:nvGrpSpPr>
-      <p:grpSpPr/>
+      <p:grpSpPr>
+        <a:xfrm>
+          <a:off x="0" y="0"/>
+          <a:ext cx="0" cy="0"/>
+          <a:chOff x="0" y="0"/>
+          <a:chExt cx="0" cy="0"/>
+        </a:xfrm>
+      </p:grpSpPr>
       <p:sp>
         <p:nvSpPr>
           <p:cNvPr id="2" name="Rectangle 1"/>
@@ -6368,6 +6430,7 @@
           <a:lstStyle/>
           <a:p>
             <a:pPr algn="ctr"/>
+            <a:endParaRPr/>
           </a:p>
         </p:txBody>
       </p:sp>
@@ -6490,6 +6553,7 @@
           <a:lstStyle/>
           <a:p>
             <a:pPr algn="ctr"/>
+            <a:endParaRPr/>
           </a:p>
         </p:txBody>
       </p:sp>
@@ -6557,7 +6621,7 @@
 </file>
 
 <file path=ppt/slides/slide14.xml><?xml version="1.0" encoding="utf-8"?>
-<p:sld xmlns:a="http://schemas.openxmlformats.org/drawingml/2006/main" xmlns:p="http://schemas.openxmlformats.org/presentationml/2006/main" xmlns:r="http://schemas.openxmlformats.org/officeDocument/2006/relationships">
+<p:sld xmlns:a="http://schemas.openxmlformats.org/drawingml/2006/main" xmlns:r="http://schemas.openxmlformats.org/officeDocument/2006/relationships" xmlns:p="http://schemas.openxmlformats.org/presentationml/2006/main">
   <p:cSld>
     <p:spTree>
       <p:nvGrpSpPr>
@@ -6565,7 +6629,14 @@
         <p:cNvGrpSpPr/>
         <p:nvPr/>
       </p:nvGrpSpPr>
-      <p:grpSpPr/>
+      <p:grpSpPr>
+        <a:xfrm>
+          <a:off x="0" y="0"/>
+          <a:ext cx="0" cy="0"/>
+          <a:chOff x="0" y="0"/>
+          <a:chExt cx="0" cy="0"/>
+        </a:xfrm>
+      </p:grpSpPr>
       <p:sp>
         <p:nvSpPr>
           <p:cNvPr id="2" name="Rectangle 1"/>
@@ -6607,6 +6678,7 @@
           <a:lstStyle/>
           <a:p>
             <a:pPr algn="ctr"/>
+            <a:endParaRPr/>
           </a:p>
         </p:txBody>
       </p:sp>
@@ -6800,7 +6872,7 @@
 </file>
 
 <file path=ppt/slides/slide15.xml><?xml version="1.0" encoding="utf-8"?>
-<p:sld xmlns:a="http://schemas.openxmlformats.org/drawingml/2006/main" xmlns:p="http://schemas.openxmlformats.org/presentationml/2006/main" xmlns:r="http://schemas.openxmlformats.org/officeDocument/2006/relationships">
+<p:sld xmlns:a="http://schemas.openxmlformats.org/drawingml/2006/main" xmlns:r="http://schemas.openxmlformats.org/officeDocument/2006/relationships" xmlns:p="http://schemas.openxmlformats.org/presentationml/2006/main">
   <p:cSld>
     <p:spTree>
       <p:nvGrpSpPr>
@@ -6808,7 +6880,14 @@
         <p:cNvGrpSpPr/>
         <p:nvPr/>
       </p:nvGrpSpPr>
-      <p:grpSpPr/>
+      <p:grpSpPr>
+        <a:xfrm>
+          <a:off x="0" y="0"/>
+          <a:ext cx="0" cy="0"/>
+          <a:chOff x="0" y="0"/>
+          <a:chExt cx="0" cy="0"/>
+        </a:xfrm>
+      </p:grpSpPr>
       <p:sp>
         <p:nvSpPr>
           <p:cNvPr id="2" name="Rectangle 1"/>
@@ -6850,6 +6929,7 @@
           <a:lstStyle/>
           <a:p>
             <a:pPr algn="ctr"/>
+            <a:endParaRPr/>
           </a:p>
         </p:txBody>
       </p:sp>
@@ -7043,7 +7123,7 @@
 </file>
 
 <file path=ppt/slides/slide16.xml><?xml version="1.0" encoding="utf-8"?>
-<p:sld xmlns:a="http://schemas.openxmlformats.org/drawingml/2006/main" xmlns:p="http://schemas.openxmlformats.org/presentationml/2006/main" xmlns:r="http://schemas.openxmlformats.org/officeDocument/2006/relationships">
+<p:sld xmlns:a="http://schemas.openxmlformats.org/drawingml/2006/main" xmlns:r="http://schemas.openxmlformats.org/officeDocument/2006/relationships" xmlns:p="http://schemas.openxmlformats.org/presentationml/2006/main">
   <p:cSld>
     <p:spTree>
       <p:nvGrpSpPr>
@@ -7051,7 +7131,14 @@
         <p:cNvGrpSpPr/>
         <p:nvPr/>
       </p:nvGrpSpPr>
-      <p:grpSpPr/>
+      <p:grpSpPr>
+        <a:xfrm>
+          <a:off x="0" y="0"/>
+          <a:ext cx="0" cy="0"/>
+          <a:chOff x="0" y="0"/>
+          <a:chExt cx="0" cy="0"/>
+        </a:xfrm>
+      </p:grpSpPr>
       <p:sp>
         <p:nvSpPr>
           <p:cNvPr id="2" name="Rectangle 1"/>
@@ -7093,6 +7180,7 @@
           <a:lstStyle/>
           <a:p>
             <a:pPr algn="ctr"/>
+            <a:endParaRPr/>
           </a:p>
         </p:txBody>
       </p:sp>
@@ -7270,7 +7358,7 @@
 </file>
 
 <file path=ppt/slides/slide17.xml><?xml version="1.0" encoding="utf-8"?>
-<p:sld xmlns:a="http://schemas.openxmlformats.org/drawingml/2006/main" xmlns:p="http://schemas.openxmlformats.org/presentationml/2006/main" xmlns:r="http://schemas.openxmlformats.org/officeDocument/2006/relationships">
+<p:sld xmlns:a="http://schemas.openxmlformats.org/drawingml/2006/main" xmlns:r="http://schemas.openxmlformats.org/officeDocument/2006/relationships" xmlns:p="http://schemas.openxmlformats.org/presentationml/2006/main">
   <p:cSld>
     <p:spTree>
       <p:nvGrpSpPr>
@@ -7278,7 +7366,14 @@
         <p:cNvGrpSpPr/>
         <p:nvPr/>
       </p:nvGrpSpPr>
-      <p:grpSpPr/>
+      <p:grpSpPr>
+        <a:xfrm>
+          <a:off x="0" y="0"/>
+          <a:ext cx="0" cy="0"/>
+          <a:chOff x="0" y="0"/>
+          <a:chExt cx="0" cy="0"/>
+        </a:xfrm>
+      </p:grpSpPr>
       <p:sp>
         <p:nvSpPr>
           <p:cNvPr id="2" name="Rectangle 1"/>
@@ -7320,6 +7415,7 @@
           <a:lstStyle/>
           <a:p>
             <a:pPr algn="ctr"/>
+            <a:endParaRPr/>
           </a:p>
         </p:txBody>
       </p:sp>
@@ -7513,7 +7609,7 @@
 </file>
 
 <file path=ppt/slides/slide18.xml><?xml version="1.0" encoding="utf-8"?>
-<p:sld xmlns:a="http://schemas.openxmlformats.org/drawingml/2006/main" xmlns:p="http://schemas.openxmlformats.org/presentationml/2006/main" xmlns:r="http://schemas.openxmlformats.org/officeDocument/2006/relationships">
+<p:sld xmlns:a="http://schemas.openxmlformats.org/drawingml/2006/main" xmlns:r="http://schemas.openxmlformats.org/officeDocument/2006/relationships" xmlns:p="http://schemas.openxmlformats.org/presentationml/2006/main">
   <p:cSld>
     <p:spTree>
       <p:nvGrpSpPr>
@@ -7521,7 +7617,14 @@
         <p:cNvGrpSpPr/>
         <p:nvPr/>
       </p:nvGrpSpPr>
-      <p:grpSpPr/>
+      <p:grpSpPr>
+        <a:xfrm>
+          <a:off x="0" y="0"/>
+          <a:ext cx="0" cy="0"/>
+          <a:chOff x="0" y="0"/>
+          <a:chExt cx="0" cy="0"/>
+        </a:xfrm>
+      </p:grpSpPr>
       <p:sp>
         <p:nvSpPr>
           <p:cNvPr id="2" name="Rectangle 1"/>
@@ -7563,6 +7666,7 @@
           <a:lstStyle/>
           <a:p>
             <a:pPr algn="ctr"/>
+            <a:endParaRPr/>
           </a:p>
         </p:txBody>
       </p:sp>
@@ -7740,7 +7844,7 @@
 </file>
 
 <file path=ppt/slides/slide19.xml><?xml version="1.0" encoding="utf-8"?>
-<p:sld xmlns:a="http://schemas.openxmlformats.org/drawingml/2006/main" xmlns:p="http://schemas.openxmlformats.org/presentationml/2006/main" xmlns:r="http://schemas.openxmlformats.org/officeDocument/2006/relationships">
+<p:sld xmlns:a="http://schemas.openxmlformats.org/drawingml/2006/main" xmlns:r="http://schemas.openxmlformats.org/officeDocument/2006/relationships" xmlns:p="http://schemas.openxmlformats.org/presentationml/2006/main">
   <p:cSld>
     <p:spTree>
       <p:nvGrpSpPr>
@@ -7748,7 +7852,14 @@
         <p:cNvGrpSpPr/>
         <p:nvPr/>
       </p:nvGrpSpPr>
-      <p:grpSpPr/>
+      <p:grpSpPr>
+        <a:xfrm>
+          <a:off x="0" y="0"/>
+          <a:ext cx="0" cy="0"/>
+          <a:chOff x="0" y="0"/>
+          <a:chExt cx="0" cy="0"/>
+        </a:xfrm>
+      </p:grpSpPr>
       <p:sp>
         <p:nvSpPr>
           <p:cNvPr id="2" name="Rectangle 1"/>
@@ -7790,6 +7901,7 @@
           <a:lstStyle/>
           <a:p>
             <a:pPr algn="ctr"/>
+            <a:endParaRPr/>
           </a:p>
         </p:txBody>
       </p:sp>
@@ -7983,7 +8095,7 @@
 </file>
 
 <file path=ppt/slides/slide2.xml><?xml version="1.0" encoding="utf-8"?>
-<p:sld xmlns:a="http://schemas.openxmlformats.org/drawingml/2006/main" xmlns:p="http://schemas.openxmlformats.org/presentationml/2006/main" xmlns:r="http://schemas.openxmlformats.org/officeDocument/2006/relationships">
+<p:sld xmlns:a="http://schemas.openxmlformats.org/drawingml/2006/main" xmlns:r="http://schemas.openxmlformats.org/officeDocument/2006/relationships" xmlns:p="http://schemas.openxmlformats.org/presentationml/2006/main">
   <p:cSld>
     <p:spTree>
       <p:nvGrpSpPr>
@@ -7991,7 +8103,14 @@
         <p:cNvGrpSpPr/>
         <p:nvPr/>
       </p:nvGrpSpPr>
-      <p:grpSpPr/>
+      <p:grpSpPr>
+        <a:xfrm>
+          <a:off x="0" y="0"/>
+          <a:ext cx="0" cy="0"/>
+          <a:chOff x="0" y="0"/>
+          <a:chExt cx="0" cy="0"/>
+        </a:xfrm>
+      </p:grpSpPr>
       <p:sp>
         <p:nvSpPr>
           <p:cNvPr id="2" name="Rectangle 1"/>
@@ -8033,6 +8152,7 @@
           <a:lstStyle/>
           <a:p>
             <a:pPr algn="ctr"/>
+            <a:endParaRPr/>
           </a:p>
         </p:txBody>
       </p:sp>
@@ -8203,7 +8323,7 @@
 </file>
 
 <file path=ppt/slides/slide20.xml><?xml version="1.0" encoding="utf-8"?>
-<p:sld xmlns:a="http://schemas.openxmlformats.org/drawingml/2006/main" xmlns:p="http://schemas.openxmlformats.org/presentationml/2006/main" xmlns:r="http://schemas.openxmlformats.org/officeDocument/2006/relationships">
+<p:sld xmlns:a="http://schemas.openxmlformats.org/drawingml/2006/main" xmlns:r="http://schemas.openxmlformats.org/officeDocument/2006/relationships" xmlns:p="http://schemas.openxmlformats.org/presentationml/2006/main">
   <p:cSld>
     <p:spTree>
       <p:nvGrpSpPr>
@@ -8211,7 +8331,14 @@
         <p:cNvGrpSpPr/>
         <p:nvPr/>
       </p:nvGrpSpPr>
-      <p:grpSpPr/>
+      <p:grpSpPr>
+        <a:xfrm>
+          <a:off x="0" y="0"/>
+          <a:ext cx="0" cy="0"/>
+          <a:chOff x="0" y="0"/>
+          <a:chExt cx="0" cy="0"/>
+        </a:xfrm>
+      </p:grpSpPr>
       <p:sp>
         <p:nvSpPr>
           <p:cNvPr id="2" name="Rectangle 1"/>
@@ -8253,6 +8380,7 @@
           <a:lstStyle/>
           <a:p>
             <a:pPr algn="ctr"/>
+            <a:endParaRPr/>
           </a:p>
         </p:txBody>
       </p:sp>
@@ -8375,6 +8503,7 @@
           <a:lstStyle/>
           <a:p>
             <a:pPr algn="ctr"/>
+            <a:endParaRPr/>
           </a:p>
         </p:txBody>
       </p:sp>
@@ -8426,7 +8555,7 @@
 </file>
 
 <file path=ppt/slides/slide21.xml><?xml version="1.0" encoding="utf-8"?>
-<p:sld xmlns:a="http://schemas.openxmlformats.org/drawingml/2006/main" xmlns:p="http://schemas.openxmlformats.org/presentationml/2006/main" xmlns:r="http://schemas.openxmlformats.org/officeDocument/2006/relationships">
+<p:sld xmlns:a="http://schemas.openxmlformats.org/drawingml/2006/main" xmlns:r="http://schemas.openxmlformats.org/officeDocument/2006/relationships" xmlns:p="http://schemas.openxmlformats.org/presentationml/2006/main">
   <p:cSld>
     <p:spTree>
       <p:nvGrpSpPr>
@@ -8434,7 +8563,14 @@
         <p:cNvGrpSpPr/>
         <p:nvPr/>
       </p:nvGrpSpPr>
-      <p:grpSpPr/>
+      <p:grpSpPr>
+        <a:xfrm>
+          <a:off x="0" y="0"/>
+          <a:ext cx="0" cy="0"/>
+          <a:chOff x="0" y="0"/>
+          <a:chExt cx="0" cy="0"/>
+        </a:xfrm>
+      </p:grpSpPr>
       <p:sp>
         <p:nvSpPr>
           <p:cNvPr id="2" name="Rectangle 1"/>
@@ -8476,6 +8612,7 @@
           <a:lstStyle/>
           <a:p>
             <a:pPr algn="ctr"/>
+            <a:endParaRPr/>
           </a:p>
         </p:txBody>
       </p:sp>
@@ -8653,7 +8790,7 @@
 </file>
 
 <file path=ppt/slides/slide22.xml><?xml version="1.0" encoding="utf-8"?>
-<p:sld xmlns:a="http://schemas.openxmlformats.org/drawingml/2006/main" xmlns:p="http://schemas.openxmlformats.org/presentationml/2006/main" xmlns:r="http://schemas.openxmlformats.org/officeDocument/2006/relationships">
+<p:sld xmlns:a="http://schemas.openxmlformats.org/drawingml/2006/main" xmlns:r="http://schemas.openxmlformats.org/officeDocument/2006/relationships" xmlns:p="http://schemas.openxmlformats.org/presentationml/2006/main">
   <p:cSld>
     <p:spTree>
       <p:nvGrpSpPr>
@@ -8661,7 +8798,14 @@
         <p:cNvGrpSpPr/>
         <p:nvPr/>
       </p:nvGrpSpPr>
-      <p:grpSpPr/>
+      <p:grpSpPr>
+        <a:xfrm>
+          <a:off x="0" y="0"/>
+          <a:ext cx="0" cy="0"/>
+          <a:chOff x="0" y="0"/>
+          <a:chExt cx="0" cy="0"/>
+        </a:xfrm>
+      </p:grpSpPr>
       <p:sp>
         <p:nvSpPr>
           <p:cNvPr id="2" name="Rectangle 1"/>
@@ -8703,6 +8847,7 @@
           <a:lstStyle/>
           <a:p>
             <a:pPr algn="ctr"/>
+            <a:endParaRPr/>
           </a:p>
         </p:txBody>
       </p:sp>
@@ -8896,7 +9041,7 @@
 </file>
 
 <file path=ppt/slides/slide23.xml><?xml version="1.0" encoding="utf-8"?>
-<p:sld xmlns:a="http://schemas.openxmlformats.org/drawingml/2006/main" xmlns:p="http://schemas.openxmlformats.org/presentationml/2006/main" xmlns:r="http://schemas.openxmlformats.org/officeDocument/2006/relationships">
+<p:sld xmlns:a="http://schemas.openxmlformats.org/drawingml/2006/main" xmlns:r="http://schemas.openxmlformats.org/officeDocument/2006/relationships" xmlns:p="http://schemas.openxmlformats.org/presentationml/2006/main">
   <p:cSld>
     <p:spTree>
       <p:nvGrpSpPr>
@@ -8904,7 +9049,14 @@
         <p:cNvGrpSpPr/>
         <p:nvPr/>
       </p:nvGrpSpPr>
-      <p:grpSpPr/>
+      <p:grpSpPr>
+        <a:xfrm>
+          <a:off x="0" y="0"/>
+          <a:ext cx="0" cy="0"/>
+          <a:chOff x="0" y="0"/>
+          <a:chExt cx="0" cy="0"/>
+        </a:xfrm>
+      </p:grpSpPr>
       <p:sp>
         <p:nvSpPr>
           <p:cNvPr id="2" name="Rectangle 1"/>
@@ -8946,6 +9098,7 @@
           <a:lstStyle/>
           <a:p>
             <a:pPr algn="ctr"/>
+            <a:endParaRPr/>
           </a:p>
         </p:txBody>
       </p:sp>
@@ -9139,7 +9292,7 @@
 </file>
 
 <file path=ppt/slides/slide24.xml><?xml version="1.0" encoding="utf-8"?>
-<p:sld xmlns:a="http://schemas.openxmlformats.org/drawingml/2006/main" xmlns:p="http://schemas.openxmlformats.org/presentationml/2006/main" xmlns:r="http://schemas.openxmlformats.org/officeDocument/2006/relationships">
+<p:sld xmlns:a="http://schemas.openxmlformats.org/drawingml/2006/main" xmlns:r="http://schemas.openxmlformats.org/officeDocument/2006/relationships" xmlns:p="http://schemas.openxmlformats.org/presentationml/2006/main">
   <p:cSld>
     <p:spTree>
       <p:nvGrpSpPr>
@@ -9147,7 +9300,14 @@
         <p:cNvGrpSpPr/>
         <p:nvPr/>
       </p:nvGrpSpPr>
-      <p:grpSpPr/>
+      <p:grpSpPr>
+        <a:xfrm>
+          <a:off x="0" y="0"/>
+          <a:ext cx="0" cy="0"/>
+          <a:chOff x="0" y="0"/>
+          <a:chExt cx="0" cy="0"/>
+        </a:xfrm>
+      </p:grpSpPr>
       <p:sp>
         <p:nvSpPr>
           <p:cNvPr id="2" name="Rectangle 1"/>
@@ -9189,6 +9349,7 @@
           <a:lstStyle/>
           <a:p>
             <a:pPr algn="ctr"/>
+            <a:endParaRPr/>
           </a:p>
         </p:txBody>
       </p:sp>
@@ -9382,7 +9543,7 @@
 </file>
 
 <file path=ppt/slides/slide25.xml><?xml version="1.0" encoding="utf-8"?>
-<p:sld xmlns:a="http://schemas.openxmlformats.org/drawingml/2006/main" xmlns:p="http://schemas.openxmlformats.org/presentationml/2006/main" xmlns:r="http://schemas.openxmlformats.org/officeDocument/2006/relationships">
+<p:sld xmlns:a="http://schemas.openxmlformats.org/drawingml/2006/main" xmlns:r="http://schemas.openxmlformats.org/officeDocument/2006/relationships" xmlns:p="http://schemas.openxmlformats.org/presentationml/2006/main">
   <p:cSld>
     <p:spTree>
       <p:nvGrpSpPr>
@@ -9390,7 +9551,14 @@
         <p:cNvGrpSpPr/>
         <p:nvPr/>
       </p:nvGrpSpPr>
-      <p:grpSpPr/>
+      <p:grpSpPr>
+        <a:xfrm>
+          <a:off x="0" y="0"/>
+          <a:ext cx="0" cy="0"/>
+          <a:chOff x="0" y="0"/>
+          <a:chExt cx="0" cy="0"/>
+        </a:xfrm>
+      </p:grpSpPr>
       <p:sp>
         <p:nvSpPr>
           <p:cNvPr id="2" name="Rectangle 1"/>
@@ -9432,6 +9600,7 @@
           <a:lstStyle/>
           <a:p>
             <a:pPr algn="ctr"/>
+            <a:endParaRPr/>
           </a:p>
         </p:txBody>
       </p:sp>
@@ -9554,6 +9723,7 @@
           <a:lstStyle/>
           <a:p>
             <a:pPr algn="ctr"/>
+            <a:endParaRPr/>
           </a:p>
         </p:txBody>
       </p:sp>
@@ -9621,7 +9791,7 @@
 </file>
 
 <file path=ppt/slides/slide26.xml><?xml version="1.0" encoding="utf-8"?>
-<p:sld xmlns:a="http://schemas.openxmlformats.org/drawingml/2006/main" xmlns:p="http://schemas.openxmlformats.org/presentationml/2006/main" xmlns:r="http://schemas.openxmlformats.org/officeDocument/2006/relationships">
+<p:sld xmlns:a="http://schemas.openxmlformats.org/drawingml/2006/main" xmlns:r="http://schemas.openxmlformats.org/officeDocument/2006/relationships" xmlns:p="http://schemas.openxmlformats.org/presentationml/2006/main">
   <p:cSld>
     <p:spTree>
       <p:nvGrpSpPr>
@@ -9629,7 +9799,14 @@
         <p:cNvGrpSpPr/>
         <p:nvPr/>
       </p:nvGrpSpPr>
-      <p:grpSpPr/>
+      <p:grpSpPr>
+        <a:xfrm>
+          <a:off x="0" y="0"/>
+          <a:ext cx="0" cy="0"/>
+          <a:chOff x="0" y="0"/>
+          <a:chExt cx="0" cy="0"/>
+        </a:xfrm>
+      </p:grpSpPr>
       <p:sp>
         <p:nvSpPr>
           <p:cNvPr id="2" name="Rectangle 1"/>
@@ -9671,6 +9848,7 @@
           <a:lstStyle/>
           <a:p>
             <a:pPr algn="ctr"/>
+            <a:endParaRPr/>
           </a:p>
         </p:txBody>
       </p:sp>
@@ -9848,7 +10026,7 @@
 </file>
 
 <file path=ppt/slides/slide27.xml><?xml version="1.0" encoding="utf-8"?>
-<p:sld xmlns:a="http://schemas.openxmlformats.org/drawingml/2006/main" xmlns:p="http://schemas.openxmlformats.org/presentationml/2006/main" xmlns:r="http://schemas.openxmlformats.org/officeDocument/2006/relationships">
+<p:sld xmlns:a="http://schemas.openxmlformats.org/drawingml/2006/main" xmlns:r="http://schemas.openxmlformats.org/officeDocument/2006/relationships" xmlns:p="http://schemas.openxmlformats.org/presentationml/2006/main">
   <p:cSld>
     <p:spTree>
       <p:nvGrpSpPr>
@@ -9856,7 +10034,14 @@
         <p:cNvGrpSpPr/>
         <p:nvPr/>
       </p:nvGrpSpPr>
-      <p:grpSpPr/>
+      <p:grpSpPr>
+        <a:xfrm>
+          <a:off x="0" y="0"/>
+          <a:ext cx="0" cy="0"/>
+          <a:chOff x="0" y="0"/>
+          <a:chExt cx="0" cy="0"/>
+        </a:xfrm>
+      </p:grpSpPr>
       <p:sp>
         <p:nvSpPr>
           <p:cNvPr id="2" name="Rectangle 1"/>
@@ -9898,6 +10083,7 @@
           <a:lstStyle/>
           <a:p>
             <a:pPr algn="ctr"/>
+            <a:endParaRPr/>
           </a:p>
         </p:txBody>
       </p:sp>
@@ -10075,7 +10261,7 @@
 </file>
 
 <file path=ppt/slides/slide28.xml><?xml version="1.0" encoding="utf-8"?>
-<p:sld xmlns:a="http://schemas.openxmlformats.org/drawingml/2006/main" xmlns:p="http://schemas.openxmlformats.org/presentationml/2006/main" xmlns:r="http://schemas.openxmlformats.org/officeDocument/2006/relationships">
+<p:sld xmlns:a="http://schemas.openxmlformats.org/drawingml/2006/main" xmlns:r="http://schemas.openxmlformats.org/officeDocument/2006/relationships" xmlns:p="http://schemas.openxmlformats.org/presentationml/2006/main">
   <p:cSld>
     <p:spTree>
       <p:nvGrpSpPr>
@@ -10083,7 +10269,14 @@
         <p:cNvGrpSpPr/>
         <p:nvPr/>
       </p:nvGrpSpPr>
-      <p:grpSpPr/>
+      <p:grpSpPr>
+        <a:xfrm>
+          <a:off x="0" y="0"/>
+          <a:ext cx="0" cy="0"/>
+          <a:chOff x="0" y="0"/>
+          <a:chExt cx="0" cy="0"/>
+        </a:xfrm>
+      </p:grpSpPr>
       <p:sp>
         <p:nvSpPr>
           <p:cNvPr id="2" name="Rectangle 1"/>
@@ -10125,6 +10318,7 @@
           <a:lstStyle/>
           <a:p>
             <a:pPr algn="ctr"/>
+            <a:endParaRPr/>
           </a:p>
         </p:txBody>
       </p:sp>
@@ -10318,7 +10512,7 @@
 </file>
 
 <file path=ppt/slides/slide29.xml><?xml version="1.0" encoding="utf-8"?>
-<p:sld xmlns:a="http://schemas.openxmlformats.org/drawingml/2006/main" xmlns:p="http://schemas.openxmlformats.org/presentationml/2006/main" xmlns:r="http://schemas.openxmlformats.org/officeDocument/2006/relationships">
+<p:sld xmlns:a="http://schemas.openxmlformats.org/drawingml/2006/main" xmlns:r="http://schemas.openxmlformats.org/officeDocument/2006/relationships" xmlns:p="http://schemas.openxmlformats.org/presentationml/2006/main">
   <p:cSld>
     <p:spTree>
       <p:nvGrpSpPr>
@@ -10326,7 +10520,14 @@
         <p:cNvGrpSpPr/>
         <p:nvPr/>
       </p:nvGrpSpPr>
-      <p:grpSpPr/>
+      <p:grpSpPr>
+        <a:xfrm>
+          <a:off x="0" y="0"/>
+          <a:ext cx="0" cy="0"/>
+          <a:chOff x="0" y="0"/>
+          <a:chExt cx="0" cy="0"/>
+        </a:xfrm>
+      </p:grpSpPr>
       <p:sp>
         <p:nvSpPr>
           <p:cNvPr id="2" name="Rectangle 1"/>
@@ -10368,6 +10569,7 @@
           <a:lstStyle/>
           <a:p>
             <a:pPr algn="ctr"/>
+            <a:endParaRPr/>
           </a:p>
         </p:txBody>
       </p:sp>
@@ -10490,6 +10692,7 @@
           <a:lstStyle/>
           <a:p>
             <a:pPr algn="ctr"/>
+            <a:endParaRPr/>
           </a:p>
         </p:txBody>
       </p:sp>
@@ -10557,7 +10760,7 @@
 </file>
 
 <file path=ppt/slides/slide3.xml><?xml version="1.0" encoding="utf-8"?>
-<p:sld xmlns:a="http://schemas.openxmlformats.org/drawingml/2006/main" xmlns:p="http://schemas.openxmlformats.org/presentationml/2006/main" xmlns:r="http://schemas.openxmlformats.org/officeDocument/2006/relationships">
+<p:sld xmlns:a="http://schemas.openxmlformats.org/drawingml/2006/main" xmlns:r="http://schemas.openxmlformats.org/officeDocument/2006/relationships" xmlns:p="http://schemas.openxmlformats.org/presentationml/2006/main">
   <p:cSld>
     <p:spTree>
       <p:nvGrpSpPr>
@@ -10565,7 +10768,14 @@
         <p:cNvGrpSpPr/>
         <p:nvPr/>
       </p:nvGrpSpPr>
-      <p:grpSpPr/>
+      <p:grpSpPr>
+        <a:xfrm>
+          <a:off x="0" y="0"/>
+          <a:ext cx="0" cy="0"/>
+          <a:chOff x="0" y="0"/>
+          <a:chExt cx="0" cy="0"/>
+        </a:xfrm>
+      </p:grpSpPr>
       <p:sp>
         <p:nvSpPr>
           <p:cNvPr id="2" name="Rectangle 1"/>
@@ -10607,6 +10817,7 @@
           <a:lstStyle/>
           <a:p>
             <a:pPr algn="ctr"/>
+            <a:endParaRPr/>
           </a:p>
         </p:txBody>
       </p:sp>
@@ -10777,7 +10988,7 @@
 </file>
 
 <file path=ppt/slides/slide30.xml><?xml version="1.0" encoding="utf-8"?>
-<p:sld xmlns:a="http://schemas.openxmlformats.org/drawingml/2006/main" xmlns:p="http://schemas.openxmlformats.org/presentationml/2006/main" xmlns:r="http://schemas.openxmlformats.org/officeDocument/2006/relationships">
+<p:sld xmlns:a="http://schemas.openxmlformats.org/drawingml/2006/main" xmlns:r="http://schemas.openxmlformats.org/officeDocument/2006/relationships" xmlns:p="http://schemas.openxmlformats.org/presentationml/2006/main">
   <p:cSld>
     <p:spTree>
       <p:nvGrpSpPr>
@@ -10785,7 +10996,14 @@
         <p:cNvGrpSpPr/>
         <p:nvPr/>
       </p:nvGrpSpPr>
-      <p:grpSpPr/>
+      <p:grpSpPr>
+        <a:xfrm>
+          <a:off x="0" y="0"/>
+          <a:ext cx="0" cy="0"/>
+          <a:chOff x="0" y="0"/>
+          <a:chExt cx="0" cy="0"/>
+        </a:xfrm>
+      </p:grpSpPr>
       <p:sp>
         <p:nvSpPr>
           <p:cNvPr id="2" name="Rectangle 1"/>
@@ -10827,6 +11045,7 @@
           <a:lstStyle/>
           <a:p>
             <a:pPr algn="ctr"/>
+            <a:endParaRPr/>
           </a:p>
         </p:txBody>
       </p:sp>
@@ -11020,7 +11239,7 @@
 </file>
 
 <file path=ppt/slides/slide31.xml><?xml version="1.0" encoding="utf-8"?>
-<p:sld xmlns:a="http://schemas.openxmlformats.org/drawingml/2006/main" xmlns:p="http://schemas.openxmlformats.org/presentationml/2006/main" xmlns:r="http://schemas.openxmlformats.org/officeDocument/2006/relationships">
+<p:sld xmlns:a="http://schemas.openxmlformats.org/drawingml/2006/main" xmlns:r="http://schemas.openxmlformats.org/officeDocument/2006/relationships" xmlns:p="http://schemas.openxmlformats.org/presentationml/2006/main">
   <p:cSld>
     <p:spTree>
       <p:nvGrpSpPr>
@@ -11028,7 +11247,14 @@
         <p:cNvGrpSpPr/>
         <p:nvPr/>
       </p:nvGrpSpPr>
-      <p:grpSpPr/>
+      <p:grpSpPr>
+        <a:xfrm>
+          <a:off x="0" y="0"/>
+          <a:ext cx="0" cy="0"/>
+          <a:chOff x="0" y="0"/>
+          <a:chExt cx="0" cy="0"/>
+        </a:xfrm>
+      </p:grpSpPr>
       <p:sp>
         <p:nvSpPr>
           <p:cNvPr id="2" name="Rectangle 1"/>
@@ -11070,6 +11296,7 @@
           <a:lstStyle/>
           <a:p>
             <a:pPr algn="ctr"/>
+            <a:endParaRPr/>
           </a:p>
         </p:txBody>
       </p:sp>
@@ -11247,7 +11474,7 @@
 </file>
 
 <file path=ppt/slides/slide32.xml><?xml version="1.0" encoding="utf-8"?>
-<p:sld xmlns:a="http://schemas.openxmlformats.org/drawingml/2006/main" xmlns:p="http://schemas.openxmlformats.org/presentationml/2006/main" xmlns:r="http://schemas.openxmlformats.org/officeDocument/2006/relationships">
+<p:sld xmlns:a="http://schemas.openxmlformats.org/drawingml/2006/main" xmlns:r="http://schemas.openxmlformats.org/officeDocument/2006/relationships" xmlns:p="http://schemas.openxmlformats.org/presentationml/2006/main">
   <p:cSld>
     <p:spTree>
       <p:nvGrpSpPr>
@@ -11255,7 +11482,14 @@
         <p:cNvGrpSpPr/>
         <p:nvPr/>
       </p:nvGrpSpPr>
-      <p:grpSpPr/>
+      <p:grpSpPr>
+        <a:xfrm>
+          <a:off x="0" y="0"/>
+          <a:ext cx="0" cy="0"/>
+          <a:chOff x="0" y="0"/>
+          <a:chExt cx="0" cy="0"/>
+        </a:xfrm>
+      </p:grpSpPr>
       <p:sp>
         <p:nvSpPr>
           <p:cNvPr id="2" name="Rectangle 1"/>
@@ -11297,6 +11531,7 @@
           <a:lstStyle/>
           <a:p>
             <a:pPr algn="ctr"/>
+            <a:endParaRPr/>
           </a:p>
         </p:txBody>
       </p:sp>
@@ -11490,7 +11725,7 @@
 </file>
 
 <file path=ppt/slides/slide33.xml><?xml version="1.0" encoding="utf-8"?>
-<p:sld xmlns:a="http://schemas.openxmlformats.org/drawingml/2006/main" xmlns:p="http://schemas.openxmlformats.org/presentationml/2006/main" xmlns:r="http://schemas.openxmlformats.org/officeDocument/2006/relationships">
+<p:sld xmlns:a="http://schemas.openxmlformats.org/drawingml/2006/main" xmlns:r="http://schemas.openxmlformats.org/officeDocument/2006/relationships" xmlns:p="http://schemas.openxmlformats.org/presentationml/2006/main">
   <p:cSld>
     <p:spTree>
       <p:nvGrpSpPr>
@@ -11498,7 +11733,14 @@
         <p:cNvGrpSpPr/>
         <p:nvPr/>
       </p:nvGrpSpPr>
-      <p:grpSpPr/>
+      <p:grpSpPr>
+        <a:xfrm>
+          <a:off x="0" y="0"/>
+          <a:ext cx="0" cy="0"/>
+          <a:chOff x="0" y="0"/>
+          <a:chExt cx="0" cy="0"/>
+        </a:xfrm>
+      </p:grpSpPr>
       <p:sp>
         <p:nvSpPr>
           <p:cNvPr id="2" name="Rectangle 1"/>
@@ -11540,6 +11782,7 @@
           <a:lstStyle/>
           <a:p>
             <a:pPr algn="ctr"/>
+            <a:endParaRPr/>
           </a:p>
         </p:txBody>
       </p:sp>
@@ -11733,7 +11976,7 @@
 </file>
 
 <file path=ppt/slides/slide34.xml><?xml version="1.0" encoding="utf-8"?>
-<p:sld xmlns:a="http://schemas.openxmlformats.org/drawingml/2006/main" xmlns:p="http://schemas.openxmlformats.org/presentationml/2006/main" xmlns:r="http://schemas.openxmlformats.org/officeDocument/2006/relationships">
+<p:sld xmlns:a="http://schemas.openxmlformats.org/drawingml/2006/main" xmlns:r="http://schemas.openxmlformats.org/officeDocument/2006/relationships" xmlns:p="http://schemas.openxmlformats.org/presentationml/2006/main">
   <p:cSld>
     <p:spTree>
       <p:nvGrpSpPr>
@@ -11741,7 +11984,14 @@
         <p:cNvGrpSpPr/>
         <p:nvPr/>
       </p:nvGrpSpPr>
-      <p:grpSpPr/>
+      <p:grpSpPr>
+        <a:xfrm>
+          <a:off x="0" y="0"/>
+          <a:ext cx="0" cy="0"/>
+          <a:chOff x="0" y="0"/>
+          <a:chExt cx="0" cy="0"/>
+        </a:xfrm>
+      </p:grpSpPr>
       <p:sp>
         <p:nvSpPr>
           <p:cNvPr id="2" name="Rectangle 1"/>
@@ -11783,6 +12033,7 @@
           <a:lstStyle/>
           <a:p>
             <a:pPr algn="ctr"/>
+            <a:endParaRPr/>
           </a:p>
         </p:txBody>
       </p:sp>
@@ -11976,7 +12227,7 @@
 </file>
 
 <file path=ppt/slides/slide35.xml><?xml version="1.0" encoding="utf-8"?>
-<p:sld xmlns:a="http://schemas.openxmlformats.org/drawingml/2006/main" xmlns:p="http://schemas.openxmlformats.org/presentationml/2006/main" xmlns:r="http://schemas.openxmlformats.org/officeDocument/2006/relationships">
+<p:sld xmlns:a="http://schemas.openxmlformats.org/drawingml/2006/main" xmlns:r="http://schemas.openxmlformats.org/officeDocument/2006/relationships" xmlns:p="http://schemas.openxmlformats.org/presentationml/2006/main">
   <p:cSld>
     <p:spTree>
       <p:nvGrpSpPr>
@@ -11984,7 +12235,14 @@
         <p:cNvGrpSpPr/>
         <p:nvPr/>
       </p:nvGrpSpPr>
-      <p:grpSpPr/>
+      <p:grpSpPr>
+        <a:xfrm>
+          <a:off x="0" y="0"/>
+          <a:ext cx="0" cy="0"/>
+          <a:chOff x="0" y="0"/>
+          <a:chExt cx="0" cy="0"/>
+        </a:xfrm>
+      </p:grpSpPr>
       <p:sp>
         <p:nvSpPr>
           <p:cNvPr id="2" name="Rectangle 1"/>
@@ -12026,6 +12284,7 @@
           <a:lstStyle/>
           <a:p>
             <a:pPr algn="ctr"/>
+            <a:endParaRPr/>
           </a:p>
         </p:txBody>
       </p:sp>
@@ -12260,7 +12519,7 @@
 </file>
 
 <file path=ppt/slides/slide4.xml><?xml version="1.0" encoding="utf-8"?>
-<p:sld xmlns:a="http://schemas.openxmlformats.org/drawingml/2006/main" xmlns:p="http://schemas.openxmlformats.org/presentationml/2006/main" xmlns:r="http://schemas.openxmlformats.org/officeDocument/2006/relationships">
+<p:sld xmlns:a="http://schemas.openxmlformats.org/drawingml/2006/main" xmlns:r="http://schemas.openxmlformats.org/officeDocument/2006/relationships" xmlns:p="http://schemas.openxmlformats.org/presentationml/2006/main">
   <p:cSld>
     <p:spTree>
       <p:nvGrpSpPr>
@@ -12268,7 +12527,14 @@
         <p:cNvGrpSpPr/>
         <p:nvPr/>
       </p:nvGrpSpPr>
-      <p:grpSpPr/>
+      <p:grpSpPr>
+        <a:xfrm>
+          <a:off x="0" y="0"/>
+          <a:ext cx="0" cy="0"/>
+          <a:chOff x="0" y="0"/>
+          <a:chExt cx="0" cy="0"/>
+        </a:xfrm>
+      </p:grpSpPr>
       <p:sp>
         <p:nvSpPr>
           <p:cNvPr id="2" name="Rectangle 1"/>
@@ -12310,6 +12576,7 @@
           <a:lstStyle/>
           <a:p>
             <a:pPr algn="ctr"/>
+            <a:endParaRPr/>
           </a:p>
         </p:txBody>
       </p:sp>
@@ -12503,7 +12770,7 @@
 </file>
 
 <file path=ppt/slides/slide5.xml><?xml version="1.0" encoding="utf-8"?>
-<p:sld xmlns:a="http://schemas.openxmlformats.org/drawingml/2006/main" xmlns:p="http://schemas.openxmlformats.org/presentationml/2006/main" xmlns:r="http://schemas.openxmlformats.org/officeDocument/2006/relationships">
+<p:sld xmlns:a="http://schemas.openxmlformats.org/drawingml/2006/main" xmlns:r="http://schemas.openxmlformats.org/officeDocument/2006/relationships" xmlns:p="http://schemas.openxmlformats.org/presentationml/2006/main">
   <p:cSld>
     <p:spTree>
       <p:nvGrpSpPr>
@@ -12511,7 +12778,14 @@
         <p:cNvGrpSpPr/>
         <p:nvPr/>
       </p:nvGrpSpPr>
-      <p:grpSpPr/>
+      <p:grpSpPr>
+        <a:xfrm>
+          <a:off x="0" y="0"/>
+          <a:ext cx="0" cy="0"/>
+          <a:chOff x="0" y="0"/>
+          <a:chExt cx="0" cy="0"/>
+        </a:xfrm>
+      </p:grpSpPr>
       <p:sp>
         <p:nvSpPr>
           <p:cNvPr id="2" name="Rectangle 1"/>
@@ -12553,6 +12827,7 @@
           <a:lstStyle/>
           <a:p>
             <a:pPr algn="ctr"/>
+            <a:endParaRPr/>
           </a:p>
         </p:txBody>
       </p:sp>
@@ -12675,6 +12950,7 @@
           <a:lstStyle/>
           <a:p>
             <a:pPr algn="ctr"/>
+            <a:endParaRPr/>
           </a:p>
         </p:txBody>
       </p:sp>
@@ -12742,7 +13018,7 @@
 </file>
 
 <file path=ppt/slides/slide6.xml><?xml version="1.0" encoding="utf-8"?>
-<p:sld xmlns:a="http://schemas.openxmlformats.org/drawingml/2006/main" xmlns:p="http://schemas.openxmlformats.org/presentationml/2006/main" xmlns:r="http://schemas.openxmlformats.org/officeDocument/2006/relationships">
+<p:sld xmlns:a="http://schemas.openxmlformats.org/drawingml/2006/main" xmlns:r="http://schemas.openxmlformats.org/officeDocument/2006/relationships" xmlns:p="http://schemas.openxmlformats.org/presentationml/2006/main">
   <p:cSld>
     <p:spTree>
       <p:nvGrpSpPr>
@@ -12750,7 +13026,14 @@
         <p:cNvGrpSpPr/>
         <p:nvPr/>
       </p:nvGrpSpPr>
-      <p:grpSpPr/>
+      <p:grpSpPr>
+        <a:xfrm>
+          <a:off x="0" y="0"/>
+          <a:ext cx="0" cy="0"/>
+          <a:chOff x="0" y="0"/>
+          <a:chExt cx="0" cy="0"/>
+        </a:xfrm>
+      </p:grpSpPr>
       <p:sp>
         <p:nvSpPr>
           <p:cNvPr id="2" name="Rectangle 1"/>
@@ -12792,6 +13075,7 @@
           <a:lstStyle/>
           <a:p>
             <a:pPr algn="ctr"/>
+            <a:endParaRPr/>
           </a:p>
         </p:txBody>
       </p:sp>
@@ -12985,7 +13269,7 @@
 </file>
 
 <file path=ppt/slides/slide7.xml><?xml version="1.0" encoding="utf-8"?>
-<p:sld xmlns:a="http://schemas.openxmlformats.org/drawingml/2006/main" xmlns:p="http://schemas.openxmlformats.org/presentationml/2006/main" xmlns:r="http://schemas.openxmlformats.org/officeDocument/2006/relationships">
+<p:sld xmlns:a="http://schemas.openxmlformats.org/drawingml/2006/main" xmlns:r="http://schemas.openxmlformats.org/officeDocument/2006/relationships" xmlns:p="http://schemas.openxmlformats.org/presentationml/2006/main">
   <p:cSld>
     <p:spTree>
       <p:nvGrpSpPr>
@@ -12993,7 +13277,14 @@
         <p:cNvGrpSpPr/>
         <p:nvPr/>
       </p:nvGrpSpPr>
-      <p:grpSpPr/>
+      <p:grpSpPr>
+        <a:xfrm>
+          <a:off x="0" y="0"/>
+          <a:ext cx="0" cy="0"/>
+          <a:chOff x="0" y="0"/>
+          <a:chExt cx="0" cy="0"/>
+        </a:xfrm>
+      </p:grpSpPr>
       <p:sp>
         <p:nvSpPr>
           <p:cNvPr id="2" name="Rectangle 1"/>
@@ -13035,6 +13326,7 @@
           <a:lstStyle/>
           <a:p>
             <a:pPr algn="ctr"/>
+            <a:endParaRPr/>
           </a:p>
         </p:txBody>
       </p:sp>
@@ -13212,7 +13504,7 @@
 </file>
 
 <file path=ppt/slides/slide8.xml><?xml version="1.0" encoding="utf-8"?>
-<p:sld xmlns:a="http://schemas.openxmlformats.org/drawingml/2006/main" xmlns:p="http://schemas.openxmlformats.org/presentationml/2006/main" xmlns:r="http://schemas.openxmlformats.org/officeDocument/2006/relationships">
+<p:sld xmlns:a="http://schemas.openxmlformats.org/drawingml/2006/main" xmlns:r="http://schemas.openxmlformats.org/officeDocument/2006/relationships" xmlns:p="http://schemas.openxmlformats.org/presentationml/2006/main">
   <p:cSld>
     <p:spTree>
       <p:nvGrpSpPr>
@@ -13220,7 +13512,14 @@
         <p:cNvGrpSpPr/>
         <p:nvPr/>
       </p:nvGrpSpPr>
-      <p:grpSpPr/>
+      <p:grpSpPr>
+        <a:xfrm>
+          <a:off x="0" y="0"/>
+          <a:ext cx="0" cy="0"/>
+          <a:chOff x="0" y="0"/>
+          <a:chExt cx="0" cy="0"/>
+        </a:xfrm>
+      </p:grpSpPr>
       <p:sp>
         <p:nvSpPr>
           <p:cNvPr id="2" name="Rectangle 1"/>
@@ -13262,6 +13561,7 @@
           <a:lstStyle/>
           <a:p>
             <a:pPr algn="ctr"/>
+            <a:endParaRPr/>
           </a:p>
         </p:txBody>
       </p:sp>
@@ -13455,7 +13755,7 @@
 </file>
 
 <file path=ppt/slides/slide9.xml><?xml version="1.0" encoding="utf-8"?>
-<p:sld xmlns:a="http://schemas.openxmlformats.org/drawingml/2006/main" xmlns:p="http://schemas.openxmlformats.org/presentationml/2006/main" xmlns:r="http://schemas.openxmlformats.org/officeDocument/2006/relationships">
+<p:sld xmlns:a="http://schemas.openxmlformats.org/drawingml/2006/main" xmlns:r="http://schemas.openxmlformats.org/officeDocument/2006/relationships" xmlns:p="http://schemas.openxmlformats.org/presentationml/2006/main">
   <p:cSld>
     <p:spTree>
       <p:nvGrpSpPr>
@@ -13463,7 +13763,14 @@
         <p:cNvGrpSpPr/>
         <p:nvPr/>
       </p:nvGrpSpPr>
-      <p:grpSpPr/>
+      <p:grpSpPr>
+        <a:xfrm>
+          <a:off x="0" y="0"/>
+          <a:ext cx="0" cy="0"/>
+          <a:chOff x="0" y="0"/>
+          <a:chExt cx="0" cy="0"/>
+        </a:xfrm>
+      </p:grpSpPr>
       <p:sp>
         <p:nvSpPr>
           <p:cNvPr id="2" name="Rectangle 1"/>
@@ -13505,6 +13812,7 @@
           <a:lstStyle/>
           <a:p>
             <a:pPr algn="ctr"/>
+            <a:endParaRPr/>
           </a:p>
         </p:txBody>
       </p:sp>
@@ -14002,7 +14310,7 @@
 </file>
 
 <file path=ppt/theme/theme2.xml><?xml version="1.0" encoding="utf-8"?>
-<a:theme xmlns:a="http://schemas.openxmlformats.org/drawingml/2006/main" name="Office Theme">
+<a:theme xmlns:a="http://schemas.openxmlformats.org/drawingml/2006/main" name="Office 테마">
   <a:themeElements>
     <a:clrScheme name="Office">
       <a:dk1>
@@ -14012,44 +14320,44 @@
         <a:sysClr val="window" lastClr="FFFFFF"/>
       </a:lt1>
       <a:dk2>
-        <a:srgbClr val="1F497D"/>
+        <a:srgbClr val="0E2841"/>
       </a:dk2>
       <a:lt2>
-        <a:srgbClr val="EEECE1"/>
+        <a:srgbClr val="E8E8E8"/>
       </a:lt2>
       <a:accent1>
-        <a:srgbClr val="4F81BD"/>
+        <a:srgbClr val="156082"/>
       </a:accent1>
       <a:accent2>
-        <a:srgbClr val="C0504D"/>
+        <a:srgbClr val="E97132"/>
       </a:accent2>
       <a:accent3>
-        <a:srgbClr val="9BBB59"/>
+        <a:srgbClr val="196B24"/>
       </a:accent3>
       <a:accent4>
-        <a:srgbClr val="8064A2"/>
+        <a:srgbClr val="0F9ED5"/>
       </a:accent4>
       <a:accent5>
-        <a:srgbClr val="4BACC6"/>
+        <a:srgbClr val="A02B93"/>
       </a:accent5>
       <a:accent6>
-        <a:srgbClr val="F79646"/>
+        <a:srgbClr val="4EA72E"/>
       </a:accent6>
       <a:hlink>
-        <a:srgbClr val="0000FF"/>
+        <a:srgbClr val="467886"/>
       </a:hlink>
       <a:folHlink>
-        <a:srgbClr val="800080"/>
+        <a:srgbClr val="96607D"/>
       </a:folHlink>
     </a:clrScheme>
     <a:fontScheme name="Office">
       <a:majorFont>
-        <a:latin typeface="Calibri"/>
+        <a:latin typeface="맑은 고딕" panose="02110004020202020204"/>
         <a:ea typeface=""/>
         <a:cs typeface=""/>
-        <a:font script="Jpan" typeface="ＭＳ Ｐゴシック"/>
+        <a:font script="Jpan" typeface="游ゴシック Light"/>
         <a:font script="Hang" typeface="맑은 고딕"/>
-        <a:font script="Hans" typeface="宋体"/>
+        <a:font script="Hans" typeface="等线 Light"/>
         <a:font script="Hant" typeface="新細明體"/>
         <a:font script="Arab" typeface="Times New Roman"/>
         <a:font script="Hebr" typeface="Times New Roman"/>
@@ -14077,14 +14385,31 @@
         <a:font script="Viet" typeface="Times New Roman"/>
         <a:font script="Uigh" typeface="Microsoft Uighur"/>
         <a:font script="Geor" typeface="Sylfaen"/>
+        <a:font script="Armn" typeface="Arial"/>
+        <a:font script="Bugi" typeface="Leelawadee UI"/>
+        <a:font script="Bopo" typeface="Microsoft JhengHei"/>
+        <a:font script="Java" typeface="Javanese Text"/>
+        <a:font script="Lisu" typeface="Segoe UI"/>
+        <a:font script="Mymr" typeface="Myanmar Text"/>
+        <a:font script="Nkoo" typeface="Ebrima"/>
+        <a:font script="Olck" typeface="Nirmala UI"/>
+        <a:font script="Osma" typeface="Ebrima"/>
+        <a:font script="Phag" typeface="Phagspa"/>
+        <a:font script="Syrn" typeface="Estrangelo Edessa"/>
+        <a:font script="Syrj" typeface="Estrangelo Edessa"/>
+        <a:font script="Syre" typeface="Estrangelo Edessa"/>
+        <a:font script="Sora" typeface="Nirmala UI"/>
+        <a:font script="Tale" typeface="Microsoft Tai Le"/>
+        <a:font script="Talu" typeface="Microsoft New Tai Lue"/>
+        <a:font script="Tfng" typeface="Ebrima"/>
       </a:majorFont>
       <a:minorFont>
-        <a:latin typeface="Calibri"/>
+        <a:latin typeface="맑은 고딕" panose="02110004020202020204"/>
         <a:ea typeface=""/>
         <a:cs typeface=""/>
-        <a:font script="Jpan" typeface="ＭＳ Ｐゴシック"/>
+        <a:font script="Jpan" typeface="游ゴシック"/>
         <a:font script="Hang" typeface="맑은 고딕"/>
-        <a:font script="Hans" typeface="宋体"/>
+        <a:font script="Hans" typeface="等线"/>
         <a:font script="Hant" typeface="新細明體"/>
         <a:font script="Arab" typeface="Arial"/>
         <a:font script="Hebr" typeface="Arial"/>
@@ -14112,6 +14437,23 @@
         <a:font script="Viet" typeface="Arial"/>
         <a:font script="Uigh" typeface="Microsoft Uighur"/>
         <a:font script="Geor" typeface="Sylfaen"/>
+        <a:font script="Armn" typeface="Arial"/>
+        <a:font script="Bugi" typeface="Leelawadee UI"/>
+        <a:font script="Bopo" typeface="Microsoft JhengHei"/>
+        <a:font script="Java" typeface="Javanese Text"/>
+        <a:font script="Lisu" typeface="Segoe UI"/>
+        <a:font script="Mymr" typeface="Myanmar Text"/>
+        <a:font script="Nkoo" typeface="Ebrima"/>
+        <a:font script="Olck" typeface="Nirmala UI"/>
+        <a:font script="Osma" typeface="Ebrima"/>
+        <a:font script="Phag" typeface="Phagspa"/>
+        <a:font script="Syrn" typeface="Estrangelo Edessa"/>
+        <a:font script="Syrj" typeface="Estrangelo Edessa"/>
+        <a:font script="Syre" typeface="Estrangelo Edessa"/>
+        <a:font script="Sora" typeface="Nirmala UI"/>
+        <a:font script="Tale" typeface="Microsoft Tai Le"/>
+        <a:font script="Talu" typeface="Microsoft New Tai Lue"/>
+        <a:font script="Tfng" typeface="Ebrima"/>
       </a:minorFont>
     </a:fontScheme>
     <a:fmtScheme name="Office">
@@ -14123,180 +14465,136 @@
           <a:gsLst>
             <a:gs pos="0">
               <a:schemeClr val="phClr">
-                <a:tint val="50000"/>
-                <a:satMod val="300000"/>
+                <a:lumMod val="110000"/>
+                <a:satMod val="105000"/>
+                <a:tint val="67000"/>
               </a:schemeClr>
             </a:gs>
-            <a:gs pos="35000">
+            <a:gs pos="50000">
               <a:schemeClr val="phClr">
-                <a:tint val="37000"/>
-                <a:satMod val="300000"/>
+                <a:lumMod val="105000"/>
+                <a:satMod val="103000"/>
+                <a:tint val="73000"/>
               </a:schemeClr>
             </a:gs>
             <a:gs pos="100000">
               <a:schemeClr val="phClr">
-                <a:tint val="15000"/>
-                <a:satMod val="350000"/>
+                <a:lumMod val="105000"/>
+                <a:satMod val="109000"/>
+                <a:tint val="81000"/>
               </a:schemeClr>
             </a:gs>
           </a:gsLst>
-          <a:lin ang="16200000" scaled="1"/>
+          <a:lin ang="5400000" scaled="0"/>
         </a:gradFill>
         <a:gradFill rotWithShape="1">
           <a:gsLst>
             <a:gs pos="0">
               <a:schemeClr val="phClr">
-                <a:tint val="100000"/>
+                <a:satMod val="103000"/>
+                <a:lumMod val="102000"/>
+                <a:tint val="94000"/>
+              </a:schemeClr>
+            </a:gs>
+            <a:gs pos="50000">
+              <a:schemeClr val="phClr">
+                <a:satMod val="110000"/>
+                <a:lumMod val="100000"/>
                 <a:shade val="100000"/>
-                <a:satMod val="130000"/>
               </a:schemeClr>
             </a:gs>
             <a:gs pos="100000">
               <a:schemeClr val="phClr">
-                <a:tint val="50000"/>
-                <a:shade val="100000"/>
-                <a:satMod val="350000"/>
+                <a:lumMod val="99000"/>
+                <a:satMod val="120000"/>
+                <a:shade val="78000"/>
               </a:schemeClr>
             </a:gs>
           </a:gsLst>
-          <a:lin ang="16200000" scaled="0"/>
+          <a:lin ang="5400000" scaled="0"/>
         </a:gradFill>
       </a:fillStyleLst>
       <a:lnStyleLst>
-        <a:ln w="9525" cap="flat" cmpd="sng" algn="ctr">
+        <a:ln w="12700" cap="flat" cmpd="sng" algn="ctr">
           <a:solidFill>
-            <a:schemeClr val="phClr">
-              <a:shade val="95000"/>
-              <a:satMod val="105000"/>
-            </a:schemeClr>
+            <a:schemeClr val="phClr"/>
           </a:solidFill>
           <a:prstDash val="solid"/>
+          <a:miter lim="800000"/>
+        </a:ln>
+        <a:ln w="19050" cap="flat" cmpd="sng" algn="ctr">
+          <a:solidFill>
+            <a:schemeClr val="phClr"/>
+          </a:solidFill>
+          <a:prstDash val="solid"/>
+          <a:miter lim="800000"/>
         </a:ln>
         <a:ln w="25400" cap="flat" cmpd="sng" algn="ctr">
           <a:solidFill>
             <a:schemeClr val="phClr"/>
           </a:solidFill>
           <a:prstDash val="solid"/>
-        </a:ln>
-        <a:ln w="38100" cap="flat" cmpd="sng" algn="ctr">
-          <a:solidFill>
-            <a:schemeClr val="phClr"/>
-          </a:solidFill>
-          <a:prstDash val="solid"/>
+          <a:miter lim="800000"/>
         </a:ln>
       </a:lnStyleLst>
       <a:effectStyleLst>
         <a:effectStyle>
+          <a:effectLst/>
+        </a:effectStyle>
+        <a:effectStyle>
+          <a:effectLst/>
+        </a:effectStyle>
+        <a:effectStyle>
           <a:effectLst>
-            <a:outerShdw blurRad="40000" dist="20000" dir="5400000" rotWithShape="0">
+            <a:outerShdw blurRad="57150" dist="19050" dir="5400000" algn="ctr" rotWithShape="0">
               <a:srgbClr val="000000">
-                <a:alpha val="38000"/>
+                <a:alpha val="63000"/>
               </a:srgbClr>
             </a:outerShdw>
           </a:effectLst>
-        </a:effectStyle>
-        <a:effectStyle>
-          <a:effectLst>
-            <a:outerShdw blurRad="40000" dist="23000" dir="5400000" rotWithShape="0">
-              <a:srgbClr val="000000">
-                <a:alpha val="35000"/>
-              </a:srgbClr>
-            </a:outerShdw>
-          </a:effectLst>
-        </a:effectStyle>
-        <a:effectStyle>
-          <a:effectLst>
-            <a:outerShdw blurRad="40000" dist="23000" dir="5400000" rotWithShape="0">
-              <a:srgbClr val="000000">
-                <a:alpha val="35000"/>
-              </a:srgbClr>
-            </a:outerShdw>
-          </a:effectLst>
-          <a:scene3d>
-            <a:camera prst="orthographicFront">
-              <a:rot lat="0" lon="0" rev="0"/>
-            </a:camera>
-            <a:lightRig rig="threePt" dir="t">
-              <a:rot lat="0" lon="0" rev="1200000"/>
-            </a:lightRig>
-          </a:scene3d>
-          <a:sp3d>
-            <a:bevelT w="63500" h="25400"/>
-          </a:sp3d>
         </a:effectStyle>
       </a:effectStyleLst>
       <a:bgFillStyleLst>
         <a:solidFill>
           <a:schemeClr val="phClr"/>
         </a:solidFill>
+        <a:solidFill>
+          <a:schemeClr val="phClr">
+            <a:tint val="95000"/>
+            <a:satMod val="170000"/>
+          </a:schemeClr>
+        </a:solidFill>
         <a:gradFill rotWithShape="1">
           <a:gsLst>
             <a:gs pos="0">
               <a:schemeClr val="phClr">
-                <a:tint val="40000"/>
-                <a:satMod val="350000"/>
+                <a:tint val="93000"/>
+                <a:satMod val="150000"/>
+                <a:shade val="98000"/>
+                <a:lumMod val="102000"/>
               </a:schemeClr>
             </a:gs>
-            <a:gs pos="40000">
+            <a:gs pos="50000">
               <a:schemeClr val="phClr">
-                <a:tint val="45000"/>
-                <a:shade val="99000"/>
-                <a:satMod val="350000"/>
+                <a:tint val="98000"/>
+                <a:satMod val="130000"/>
+                <a:shade val="90000"/>
+                <a:lumMod val="103000"/>
               </a:schemeClr>
             </a:gs>
             <a:gs pos="100000">
               <a:schemeClr val="phClr">
-                <a:shade val="20000"/>
-                <a:satMod val="255000"/>
+                <a:shade val="63000"/>
+                <a:satMod val="120000"/>
               </a:schemeClr>
             </a:gs>
           </a:gsLst>
-          <a:path path="circle">
-            <a:fillToRect l="50000" t="-80000" r="50000" b="180000"/>
-          </a:path>
-        </a:gradFill>
-        <a:gradFill rotWithShape="1">
-          <a:gsLst>
-            <a:gs pos="0">
-              <a:schemeClr val="phClr">
-                <a:tint val="80000"/>
-                <a:satMod val="300000"/>
-              </a:schemeClr>
-            </a:gs>
-            <a:gs pos="100000">
-              <a:schemeClr val="phClr">
-                <a:shade val="30000"/>
-                <a:satMod val="200000"/>
-              </a:schemeClr>
-            </a:gs>
-          </a:gsLst>
-          <a:path path="circle">
-            <a:fillToRect l="50000" t="50000" r="50000" b="50000"/>
-          </a:path>
+          <a:lin ang="5400000" scaled="0"/>
         </a:gradFill>
       </a:bgFillStyleLst>
     </a:fmtScheme>
   </a:themeElements>
   <a:objectDefaults>
-    <a:spDef>
-      <a:spPr/>
-      <a:bodyPr/>
-      <a:lstStyle/>
-      <a:style>
-        <a:lnRef idx="1">
-          <a:schemeClr val="accent1"/>
-        </a:lnRef>
-        <a:fillRef idx="3">
-          <a:schemeClr val="accent1"/>
-        </a:fillRef>
-        <a:effectRef idx="2">
-          <a:schemeClr val="accent1"/>
-        </a:effectRef>
-        <a:fontRef idx="minor">
-          <a:schemeClr val="lt1"/>
-        </a:fontRef>
-      </a:style>
-    </a:spDef>
     <a:lnDef>
       <a:spPr/>
       <a:bodyPr/>
@@ -14318,5 +14616,10 @@
     </a:lnDef>
   </a:objectDefaults>
   <a:extraClrSchemeLst/>
+  <a:extLst>
+    <a:ext uri="{05A4C25C-085E-4340-85A3-A5531E510DB2}">
+      <thm15:themeFamily xmlns:thm15="http://schemas.microsoft.com/office/thememl/2012/main" name="Office Theme" id="{2E142A2C-CD16-42D6-873A-C26D2A0506FA}" vid="{1BDDFF52-6CD6-40A5-AB3C-68EB2F1E4D0A}"/>
+    </a:ext>
+  </a:extLst>
 </a:theme>
 </file>